--- a/output/source/AIOps_조별 과제_광주_3반_GroundWatch.pptx
+++ b/output/source/AIOps_조별 과제_광주_3반_GroundWatch.pptx
@@ -2,57 +2,57 @@
 <file path=ppt/presentation.xml><?xml version="1.0" encoding="utf-8"?>
 <p:presentation xmlns:p="http://schemas.openxmlformats.org/presentationml/2006/main" embedTrueTypeFonts="1" saveSubsetFonts="0">
   <p:sldMasterIdLst>
-    <p:sldMasterId xmlns:r="http://schemas.openxmlformats.org/officeDocument/2006/relationships" id="2147483648" r:id="Rc4a4c127cd0b499a"/>
+    <p:sldMasterId xmlns:r="http://schemas.openxmlformats.org/officeDocument/2006/relationships" id="2147483648" r:id="R4555a1525aaf4726"/>
   </p:sldMasterIdLst>
   <p:notesMasterIdLst>
-    <p:notesMasterId xmlns:r="http://schemas.openxmlformats.org/officeDocument/2006/relationships" r:id="R0298463fc9a94958"/>
+    <p:notesMasterId xmlns:r="http://schemas.openxmlformats.org/officeDocument/2006/relationships" r:id="Rd1493c11c9e740c8"/>
   </p:notesMasterIdLst>
   <p:sldIdLst>
-    <p:sldId xmlns:r="http://schemas.openxmlformats.org/officeDocument/2006/relationships" id="256" r:id="Re0f69436acfc455f"/>
-    <p:sldId xmlns:r="http://schemas.openxmlformats.org/officeDocument/2006/relationships" id="257" r:id="R0429f51b3c3e40d3"/>
-    <p:sldId xmlns:r="http://schemas.openxmlformats.org/officeDocument/2006/relationships" id="258" r:id="Rf8d5e36872004cd7"/>
-    <p:sldId xmlns:r="http://schemas.openxmlformats.org/officeDocument/2006/relationships" id="259" r:id="R80397d24b9584502"/>
-    <p:sldId xmlns:r="http://schemas.openxmlformats.org/officeDocument/2006/relationships" id="260" r:id="Rdaadd6f8f519482b"/>
-    <p:sldId xmlns:r="http://schemas.openxmlformats.org/officeDocument/2006/relationships" id="261" r:id="R003c1d7a273a41a5"/>
-    <p:sldId xmlns:r="http://schemas.openxmlformats.org/officeDocument/2006/relationships" id="262" r:id="Re5412dde0d0948fc"/>
-    <p:sldId xmlns:r="http://schemas.openxmlformats.org/officeDocument/2006/relationships" id="263" r:id="R500a915aa12a4804"/>
-    <p:sldId xmlns:r="http://schemas.openxmlformats.org/officeDocument/2006/relationships" id="264" r:id="R546a9bd6836c4c9a"/>
-    <p:sldId xmlns:r="http://schemas.openxmlformats.org/officeDocument/2006/relationships" id="265" r:id="R7b9fd8e966d140eb"/>
-    <p:sldId xmlns:r="http://schemas.openxmlformats.org/officeDocument/2006/relationships" id="266" r:id="R81198ea60fa647c6"/>
-    <p:sldId xmlns:r="http://schemas.openxmlformats.org/officeDocument/2006/relationships" id="267" r:id="R17525d14fe40492b"/>
-    <p:sldId xmlns:r="http://schemas.openxmlformats.org/officeDocument/2006/relationships" id="268" r:id="R9558198de74640c8"/>
-    <p:sldId xmlns:r="http://schemas.openxmlformats.org/officeDocument/2006/relationships" id="269" r:id="Rdd37612fddfa4af2"/>
-    <p:sldId xmlns:r="http://schemas.openxmlformats.org/officeDocument/2006/relationships" id="270" r:id="Rd07a793deeb04f1c"/>
-    <p:sldId xmlns:r="http://schemas.openxmlformats.org/officeDocument/2006/relationships" id="271" r:id="Rf1de0ae061964465"/>
-    <p:sldId xmlns:r="http://schemas.openxmlformats.org/officeDocument/2006/relationships" id="272" r:id="R33cfc7e2831b4455"/>
-    <p:sldId xmlns:r="http://schemas.openxmlformats.org/officeDocument/2006/relationships" id="273" r:id="R87760ae00c874339"/>
-    <p:sldId xmlns:r="http://schemas.openxmlformats.org/officeDocument/2006/relationships" id="274" r:id="R7bf8b4b21f5542c9"/>
-    <p:sldId xmlns:r="http://schemas.openxmlformats.org/officeDocument/2006/relationships" id="275" r:id="R6ba4fadad7074f74"/>
-    <p:sldId xmlns:r="http://schemas.openxmlformats.org/officeDocument/2006/relationships" id="276" r:id="Rc5d60f9f005e4a35"/>
-    <p:sldId xmlns:r="http://schemas.openxmlformats.org/officeDocument/2006/relationships" id="277" r:id="Ra9dba1e7b122441c"/>
-    <p:sldId xmlns:r="http://schemas.openxmlformats.org/officeDocument/2006/relationships" id="278" r:id="R0376fb9beee24d52"/>
-    <p:sldId xmlns:r="http://schemas.openxmlformats.org/officeDocument/2006/relationships" id="279" r:id="R5566a23ca12d4340"/>
-    <p:sldId xmlns:r="http://schemas.openxmlformats.org/officeDocument/2006/relationships" id="280" r:id="R2adb3bf5b2174ad9"/>
-    <p:sldId xmlns:r="http://schemas.openxmlformats.org/officeDocument/2006/relationships" id="281" r:id="R84058cfa5c524be8"/>
-    <p:sldId xmlns:r="http://schemas.openxmlformats.org/officeDocument/2006/relationships" id="282" r:id="R561169faca2f455a"/>
-    <p:sldId xmlns:r="http://schemas.openxmlformats.org/officeDocument/2006/relationships" id="283" r:id="Rbc48897d67ba4f8a"/>
-    <p:sldId xmlns:r="http://schemas.openxmlformats.org/officeDocument/2006/relationships" id="284" r:id="Rb85570140f154fef"/>
-    <p:sldId xmlns:r="http://schemas.openxmlformats.org/officeDocument/2006/relationships" id="285" r:id="R312922604a364757"/>
-    <p:sldId xmlns:r="http://schemas.openxmlformats.org/officeDocument/2006/relationships" id="286" r:id="Rb85619c33dca4950"/>
-    <p:sldId xmlns:r="http://schemas.openxmlformats.org/officeDocument/2006/relationships" id="287" r:id="Rd0a7e87ae2424d98"/>
-    <p:sldId xmlns:r="http://schemas.openxmlformats.org/officeDocument/2006/relationships" id="288" r:id="Rfb93e7f8cdcc4527"/>
-    <p:sldId xmlns:r="http://schemas.openxmlformats.org/officeDocument/2006/relationships" id="289" r:id="Rc41081a71e944d79"/>
-    <p:sldId xmlns:r="http://schemas.openxmlformats.org/officeDocument/2006/relationships" id="290" r:id="Rf53231d016164feb"/>
-    <p:sldId xmlns:r="http://schemas.openxmlformats.org/officeDocument/2006/relationships" id="291" r:id="R42848a3e50e040e3"/>
-    <p:sldId xmlns:r="http://schemas.openxmlformats.org/officeDocument/2006/relationships" id="292" r:id="Rd4700e6487e84f2f"/>
+    <p:sldId xmlns:r="http://schemas.openxmlformats.org/officeDocument/2006/relationships" id="256" r:id="Re8048c09bb044531"/>
+    <p:sldId xmlns:r="http://schemas.openxmlformats.org/officeDocument/2006/relationships" id="257" r:id="R3b2d5a0c8ade42c5"/>
+    <p:sldId xmlns:r="http://schemas.openxmlformats.org/officeDocument/2006/relationships" id="258" r:id="Raf68b8cb5b8f4dd0"/>
+    <p:sldId xmlns:r="http://schemas.openxmlformats.org/officeDocument/2006/relationships" id="259" r:id="Re5cd3ae633c344f5"/>
+    <p:sldId xmlns:r="http://schemas.openxmlformats.org/officeDocument/2006/relationships" id="260" r:id="R1aaa87b2f9c7432a"/>
+    <p:sldId xmlns:r="http://schemas.openxmlformats.org/officeDocument/2006/relationships" id="261" r:id="Rce3e2ab2595549ef"/>
+    <p:sldId xmlns:r="http://schemas.openxmlformats.org/officeDocument/2006/relationships" id="262" r:id="Rbd1ba38e62ed4baf"/>
+    <p:sldId xmlns:r="http://schemas.openxmlformats.org/officeDocument/2006/relationships" id="263" r:id="R484ee479f376458d"/>
+    <p:sldId xmlns:r="http://schemas.openxmlformats.org/officeDocument/2006/relationships" id="264" r:id="Rea72a57e8e794aae"/>
+    <p:sldId xmlns:r="http://schemas.openxmlformats.org/officeDocument/2006/relationships" id="265" r:id="Rd16c731358134a82"/>
+    <p:sldId xmlns:r="http://schemas.openxmlformats.org/officeDocument/2006/relationships" id="266" r:id="Refd4587a8d474367"/>
+    <p:sldId xmlns:r="http://schemas.openxmlformats.org/officeDocument/2006/relationships" id="267" r:id="Re5b4e041f75049ad"/>
+    <p:sldId xmlns:r="http://schemas.openxmlformats.org/officeDocument/2006/relationships" id="268" r:id="R5e4ecd7e9ebf4497"/>
+    <p:sldId xmlns:r="http://schemas.openxmlformats.org/officeDocument/2006/relationships" id="269" r:id="Rdb9d35bba3e54388"/>
+    <p:sldId xmlns:r="http://schemas.openxmlformats.org/officeDocument/2006/relationships" id="270" r:id="Re6fd197cb75c4661"/>
+    <p:sldId xmlns:r="http://schemas.openxmlformats.org/officeDocument/2006/relationships" id="271" r:id="R1aaa2ac9e19e4ca4"/>
+    <p:sldId xmlns:r="http://schemas.openxmlformats.org/officeDocument/2006/relationships" id="272" r:id="R4890e40e9e8f4fc7"/>
+    <p:sldId xmlns:r="http://schemas.openxmlformats.org/officeDocument/2006/relationships" id="273" r:id="R8cd3541b56b74e24"/>
+    <p:sldId xmlns:r="http://schemas.openxmlformats.org/officeDocument/2006/relationships" id="274" r:id="R09d8ca84defd4b70"/>
+    <p:sldId xmlns:r="http://schemas.openxmlformats.org/officeDocument/2006/relationships" id="275" r:id="Re7dcc2427f3a42b5"/>
+    <p:sldId xmlns:r="http://schemas.openxmlformats.org/officeDocument/2006/relationships" id="276" r:id="R7703d67c70964ea6"/>
+    <p:sldId xmlns:r="http://schemas.openxmlformats.org/officeDocument/2006/relationships" id="277" r:id="R5ef4506f206440e7"/>
+    <p:sldId xmlns:r="http://schemas.openxmlformats.org/officeDocument/2006/relationships" id="278" r:id="R810d453499c34ea5"/>
+    <p:sldId xmlns:r="http://schemas.openxmlformats.org/officeDocument/2006/relationships" id="279" r:id="R03ae18c24f184066"/>
+    <p:sldId xmlns:r="http://schemas.openxmlformats.org/officeDocument/2006/relationships" id="280" r:id="R27cb149d148b46e4"/>
+    <p:sldId xmlns:r="http://schemas.openxmlformats.org/officeDocument/2006/relationships" id="281" r:id="R24e80a0da26b4598"/>
+    <p:sldId xmlns:r="http://schemas.openxmlformats.org/officeDocument/2006/relationships" id="282" r:id="R4f02cf6a65b441ee"/>
+    <p:sldId xmlns:r="http://schemas.openxmlformats.org/officeDocument/2006/relationships" id="283" r:id="Re92367c3abbe4c30"/>
+    <p:sldId xmlns:r="http://schemas.openxmlformats.org/officeDocument/2006/relationships" id="284" r:id="R88258566d1f24b01"/>
+    <p:sldId xmlns:r="http://schemas.openxmlformats.org/officeDocument/2006/relationships" id="285" r:id="R3546a50baef24c1d"/>
+    <p:sldId xmlns:r="http://schemas.openxmlformats.org/officeDocument/2006/relationships" id="286" r:id="Rdca07c26e50a43b1"/>
+    <p:sldId xmlns:r="http://schemas.openxmlformats.org/officeDocument/2006/relationships" id="287" r:id="R2711b1c677c54375"/>
+    <p:sldId xmlns:r="http://schemas.openxmlformats.org/officeDocument/2006/relationships" id="288" r:id="Rf5d8bb8172e44b39"/>
+    <p:sldId xmlns:r="http://schemas.openxmlformats.org/officeDocument/2006/relationships" id="289" r:id="Rf9a9c93bd4674631"/>
+    <p:sldId xmlns:r="http://schemas.openxmlformats.org/officeDocument/2006/relationships" id="290" r:id="Rac08c2a7736d42bb"/>
+    <p:sldId xmlns:r="http://schemas.openxmlformats.org/officeDocument/2006/relationships" id="291" r:id="R54717124b50c453b"/>
+    <p:sldId xmlns:r="http://schemas.openxmlformats.org/officeDocument/2006/relationships" id="292" r:id="R0b549baa05cf4a23"/>
   </p:sldIdLst>
   <p:sldSz cx="9144000" cy="5143500"/>
   <p:notesSz cx="6858000" cy="9144000"/>
   <p:embeddedFontLst>
     <p:embeddedFont>
       <p:font typeface="NanumGothic"/>
-      <p:regular xmlns:r="http://schemas.openxmlformats.org/officeDocument/2006/relationships" r:id="R2ea032b8688f4e2e"/>
-      <p:bold xmlns:r="http://schemas.openxmlformats.org/officeDocument/2006/relationships" r:id="Ra88f71a985b64e04"/>
+      <p:regular xmlns:r="http://schemas.openxmlformats.org/officeDocument/2006/relationships" r:id="Rd40a6b6aba014f4f"/>
+      <p:bold xmlns:r="http://schemas.openxmlformats.org/officeDocument/2006/relationships" r:id="R628d754907f44a45"/>
     </p:embeddedFont>
   </p:embeddedFontLst>
 </p:presentation>
@@ -485,7 +485,7 @@
           <a:lstStyle xmlns:a="http://schemas.openxmlformats.org/drawingml/2006/main"/>
           <a:p xmlns:a="http://schemas.openxmlformats.org/drawingml/2006/main">
             <a:r>
-              <a:t>안녕하세요. 광주3반 5조 발표를 맡은 한형준입니다. GroundWatch는 서울 25개 구별 대표 관측소의 수위·강수를 기본 화면에 제공합니다. 구 전체 평균은 아닙니다. 확보 서울 실측은 2024년까지라 오늘 기준 예측은 미준비이며 저장자료 검증 모드에서 과거 모델을 확인합니다. 전국 실측 3곳의 280일 자료와 장마 평가는 추가 조회이고 운영 미승인입니다. 입력 마지막 날의 1일 뒤 수위를 추정하며, 발행 시점에 따라 당일 추정과 다음 날 예측을 구분합니다. 오늘은 운영 기준과 실제 동작 결과를 설명하겠습니다.</a:t>
+              <a:t>안녕하세요. 광주3반 5조 발표를 맡은 한형준입니다. GroundWatch는 서울 25개 구별 대표 관측소의 수위·강수를 기본 화면에 제공합니다. 구 전체 평균은 아닙니다. 서울 추가 실측은9월30일까지 확보했고 이후 합성 확장을 명확히 구분합니다. 추가 실측 조회가 기존 모델의 재평가나 승격 완료를 뜻하지는 않습니다. 전국 실측 3곳의 280일 자료와 장마 평가는 추가 조회이고 운영 미승인입니다. 입력 마지막 날의 1일 뒤 수위를 추정하며, 발행 시점에 따라 당일 추정과 다음 날 예측을 구분합니다. 오늘은 운영 기준과 실제 동작 결과를 설명하겠습니다.</a:t>
             </a:r>
           </a:p>
           <a:p xmlns:a="http://schemas.openxmlformats.org/drawingml/2006/main">
@@ -575,46 +575,6 @@
           </a:p>
           <a:p xmlns:a="http://schemas.openxmlformats.org/drawingml/2006/main">
             <a:r>
-              <a:t>서울 기존 모델은 초기 검증 구간, 전국 모델은 동결한 holdout 구간을 기준으로 guard와 오차 임계값을 계산합니다.</a:t>
-            </a:r>
-          </a:p>
-          <a:p xmlns:a="http://schemas.openxmlformats.org/drawingml/2006/main">
-            <a:r>
-              <a:t/>
-            </a:r>
-          </a:p>
-          <a:p xmlns:a="http://schemas.openxmlformats.org/drawingml/2006/main">
-            <a:r>
-              <a:t>서울 기존 모델은 초기 검증 구간, 전국 모델은 동결한 holdout 구간을 기준으로 guard와 오차 임계값을 계산합니다.</a:t>
-            </a:r>
-          </a:p>
-          <a:p xmlns:a="http://schemas.openxmlformats.org/drawingml/2006/main">
-            <a:r>
-              <a:t/>
-            </a:r>
-          </a:p>
-          <a:p xmlns:a="http://schemas.openxmlformats.org/drawingml/2006/main">
-            <a:r>
-              <a:t>서울 기존 모델은 초기 검증 구간, 전국 모델은 동결한 holdout 구간을 기준으로 guard와 오차 임계값을 계산합니다.</a:t>
-            </a:r>
-          </a:p>
-          <a:p xmlns:a="http://schemas.openxmlformats.org/drawingml/2006/main">
-            <a:r>
-              <a:t/>
-            </a:r>
-          </a:p>
-          <a:p xmlns:a="http://schemas.openxmlformats.org/drawingml/2006/main">
-            <a:r>
-              <a:t>서울 기존 모델은 초기 검증 구간, 전국 모델은 동결한 holdout 구간을 기준으로 guard와 오차 임계값을 계산합니다.</a:t>
-            </a:r>
-          </a:p>
-          <a:p xmlns:a="http://schemas.openxmlformats.org/drawingml/2006/main">
-            <a:r>
-              <a:t/>
-            </a:r>
-          </a:p>
-          <a:p xmlns:a="http://schemas.openxmlformats.org/drawingml/2006/main">
-            <a:r>
               <a:t>모델을 배포하기 전에 입력과 성능을 차례로 검사합니다. 입력은 연속 20일인지, 관측소와 날짜·단위가 맞는지, 강수가 0 이상인지 확인합니다. 초기 모델은 persistence 검증 RMSE의 110% 이내여야 합니다. 재학습 후보는 학습 이후 새로 확보한 정답 30일에서 기존 모델보다 오차가 5% 이상 줄어야 하고, 과거 검증 구간도 110% 허용 범위를 통과해야 합니다. 마지막으로 모델 로드와 시험 예측이 성공해야 서빙 모델을 바꿉니다.</a:t>
             </a:r>
           </a:p>
@@ -705,46 +665,6 @@
           </a:p>
           <a:p xmlns:a="http://schemas.openxmlformats.org/drawingml/2006/main">
             <a:r>
-              <a:t>서울 기존 모델은 초기 검증 구간, 전국 모델은 동결한 holdout 구간을 기준으로 guard와 오차 임계값을 계산합니다.</a:t>
-            </a:r>
-          </a:p>
-          <a:p xmlns:a="http://schemas.openxmlformats.org/drawingml/2006/main">
-            <a:r>
-              <a:t/>
-            </a:r>
-          </a:p>
-          <a:p xmlns:a="http://schemas.openxmlformats.org/drawingml/2006/main">
-            <a:r>
-              <a:t>서울 기존 모델은 초기 검증 구간, 전국 모델은 동결한 holdout 구간을 기준으로 guard와 오차 임계값을 계산합니다.</a:t>
-            </a:r>
-          </a:p>
-          <a:p xmlns:a="http://schemas.openxmlformats.org/drawingml/2006/main">
-            <a:r>
-              <a:t/>
-            </a:r>
-          </a:p>
-          <a:p xmlns:a="http://schemas.openxmlformats.org/drawingml/2006/main">
-            <a:r>
-              <a:t>서울 기존 모델은 초기 검증 구간, 전국 모델은 동결한 holdout 구간을 기준으로 guard와 오차 임계값을 계산합니다.</a:t>
-            </a:r>
-          </a:p>
-          <a:p xmlns:a="http://schemas.openxmlformats.org/drawingml/2006/main">
-            <a:r>
-              <a:t/>
-            </a:r>
-          </a:p>
-          <a:p xmlns:a="http://schemas.openxmlformats.org/drawingml/2006/main">
-            <a:r>
-              <a:t>서울 기존 모델은 초기 검증 구간, 전국 모델은 동결한 holdout 구간을 기준으로 guard와 오차 임계값을 계산합니다.</a:t>
-            </a:r>
-          </a:p>
-          <a:p xmlns:a="http://schemas.openxmlformats.org/drawingml/2006/main">
-            <a:r>
-              <a:t/>
-            </a:r>
-          </a:p>
-          <a:p xmlns:a="http://schemas.openxmlformats.org/drawingml/2006/main">
-            <a:r>
               <a:t>서비스와 모델을 각각 감시합니다. 서비스는 300초에 최소 20요청이 모였을 때 p95가 1초를 넘거나 5xx 비율이 1% 이상이면 이벤트를 기록합니다. 모델은 21일 RMSE를 사용하고 정상 검증 구간의 rolling RMSE 95백분위에 1.5배를 곱한 값을 임계로 사용합니다. 단발 초과에 반응하지 않도록 연속 2회 조건을 두고, 중복 재학습을 줄이기 위해 21일 cooldown을 적용했습니다. 이 값들은 과제의 운영 정책이며 지반 안전 기준은 아닙니다.</a:t>
             </a:r>
           </a:p>
@@ -1485,7 +1405,7 @@
           <a:lstStyle xmlns:a="http://schemas.openxmlformats.org/drawingml/2006/main"/>
           <a:p xmlns:a="http://schemas.openxmlformats.org/drawingml/2006/main">
             <a:r>
-              <a:t>저희는 지하수 업무 담당자와 서비스 운영자를 이해관계자로 정의했습니다. 업무 담당자는 서울 구별 대표 관측소의 자료의 날짜와 수위 추정·예측을 함께 확인해야 합니다. 운영자는 서버가 켜져 있어도 입력이나 모델이 부족할 수 있고, 예측은 계속 나오지만 품질이 떨어질 수도 있다는 문제를 다룹니다. 그래서 예측값과 함께 자료의 시점, 사용 모델, 최근 오차와 대응 상태를 확인할 수 있게 구성했습니다.</a:t>
+              <a:t>제안 B2B 고객은 지하수 관측·시설 유지관리 업무를 수행하는 기업의 운영 담당자입니다. 업무 담당자는 수위·강수·입력 날짜와 모델 품질을 함께 확인하고, 모델 운영자는 오차 증가와 재학습·교체 근거를 관리합니다. 공공기관은 자료 제공·현장 검증 협업 대상이며 공공기관 직접 판매는 B2G입니다. B2G가 과제 B2B 조건으로 인정됐다고 주장하지 않으며 실제 고객 도입·계약·매출·현장 효과는 아직 검증하지 않았습니다.</a:t>
             </a:r>
           </a:p>
           <a:p xmlns:a="http://schemas.openxmlformats.org/drawingml/2006/main">
@@ -1575,46 +1495,6 @@
           </a:p>
           <a:p xmlns:a="http://schemas.openxmlformats.org/drawingml/2006/main">
             <a:r>
-              <a:t>[기존 서울 합성 교체 시연의 실제 실행 화면]</a:t>
-            </a:r>
-          </a:p>
-          <a:p xmlns:a="http://schemas.openxmlformats.org/drawingml/2006/main">
-            <a:r>
-              <a:t/>
-            </a:r>
-          </a:p>
-          <a:p xmlns:a="http://schemas.openxmlformats.org/drawingml/2006/main">
-            <a:r>
-              <a:t>[기존 서울 합성 교체 시연의 실제 실행 화면]</a:t>
-            </a:r>
-          </a:p>
-          <a:p xmlns:a="http://schemas.openxmlformats.org/drawingml/2006/main">
-            <a:r>
-              <a:t/>
-            </a:r>
-          </a:p>
-          <a:p xmlns:a="http://schemas.openxmlformats.org/drawingml/2006/main">
-            <a:r>
-              <a:t>[기존 서울 합성 교체 시연의 실제 실행 화면]</a:t>
-            </a:r>
-          </a:p>
-          <a:p xmlns:a="http://schemas.openxmlformats.org/drawingml/2006/main">
-            <a:r>
-              <a:t/>
-            </a:r>
-          </a:p>
-          <a:p xmlns:a="http://schemas.openxmlformats.org/drawingml/2006/main">
-            <a:r>
-              <a:t>[기존 서울 합성 교체 시연의 실제 실행 화면]</a:t>
-            </a:r>
-          </a:p>
-          <a:p xmlns:a="http://schemas.openxmlformats.org/drawingml/2006/main">
-            <a:r>
-              <a:t/>
-            </a:r>
-          </a:p>
-          <a:p xmlns:a="http://schemas.openxmlformats.org/drawingml/2006/main">
-            <a:r>
               <a:t>실제 진단 화면입니다. container가 true이고 컨테이너 ID와 API 프로세스 9, worker 프로세스 7을 확인할 수 있습니다. worker_running도 true입니다. 이는 프로세스가 실행 중이라는 증거이며 모델 품질이나 장기 가용성까지 입증하는 값은 아닙니다. 다음 화면들은 이 검증 과정에서 직접 캡처한 결과입니다.</a:t>
             </a:r>
           </a:p>
@@ -1705,46 +1585,6 @@
           </a:p>
           <a:p xmlns:a="http://schemas.openxmlformats.org/drawingml/2006/main">
             <a:r>
-              <a:t>[기존 서울 합성 교체 시연의 실제 실행 화면]</a:t>
-            </a:r>
-          </a:p>
-          <a:p xmlns:a="http://schemas.openxmlformats.org/drawingml/2006/main">
-            <a:r>
-              <a:t/>
-            </a:r>
-          </a:p>
-          <a:p xmlns:a="http://schemas.openxmlformats.org/drawingml/2006/main">
-            <a:r>
-              <a:t>[기존 서울 합성 교체 시연의 실제 실행 화면]</a:t>
-            </a:r>
-          </a:p>
-          <a:p xmlns:a="http://schemas.openxmlformats.org/drawingml/2006/main">
-            <a:r>
-              <a:t/>
-            </a:r>
-          </a:p>
-          <a:p xmlns:a="http://schemas.openxmlformats.org/drawingml/2006/main">
-            <a:r>
-              <a:t>[기존 서울 합성 교체 시연의 실제 실행 화면]</a:t>
-            </a:r>
-          </a:p>
-          <a:p xmlns:a="http://schemas.openxmlformats.org/drawingml/2006/main">
-            <a:r>
-              <a:t/>
-            </a:r>
-          </a:p>
-          <a:p xmlns:a="http://schemas.openxmlformats.org/drawingml/2006/main">
-            <a:r>
-              <a:t>[기존 서울 합성 교체 시연의 실제 실행 화면]</a:t>
-            </a:r>
-          </a:p>
-          <a:p xmlns:a="http://schemas.openxmlformats.org/drawingml/2006/main">
-            <a:r>
-              <a:t/>
-            </a:r>
-          </a:p>
-          <a:p xmlns:a="http://schemas.openxmlformats.org/drawingml/2006/main">
-            <a:r>
               <a:t>종로구의 시연 시작 상태입니다. 모델 버전은 1이고 7월 10일 입력으로 7월 11일 수위를 예측했습니다. 예측값은 약 -22.6053 gl.-m입니다. 이 시점에는 후속 정답이 0일이므로 오차 평가와 드리프트 판단은 대기합니다. 이후 같은 시연에서 자료를 진행하겠습니다.</a:t>
             </a:r>
           </a:p>
@@ -1835,46 +1675,6 @@
           </a:p>
           <a:p xmlns:a="http://schemas.openxmlformats.org/drawingml/2006/main">
             <a:r>
-              <a:t>[기존 서울 합성 교체 시연의 실제 실행 화면]</a:t>
-            </a:r>
-          </a:p>
-          <a:p xmlns:a="http://schemas.openxmlformats.org/drawingml/2006/main">
-            <a:r>
-              <a:t/>
-            </a:r>
-          </a:p>
-          <a:p xmlns:a="http://schemas.openxmlformats.org/drawingml/2006/main">
-            <a:r>
-              <a:t>[기존 서울 합성 교체 시연의 실제 실행 화면]</a:t>
-            </a:r>
-          </a:p>
-          <a:p xmlns:a="http://schemas.openxmlformats.org/drawingml/2006/main">
-            <a:r>
-              <a:t/>
-            </a:r>
-          </a:p>
-          <a:p xmlns:a="http://schemas.openxmlformats.org/drawingml/2006/main">
-            <a:r>
-              <a:t>[기존 서울 합성 교체 시연의 실제 실행 화면]</a:t>
-            </a:r>
-          </a:p>
-          <a:p xmlns:a="http://schemas.openxmlformats.org/drawingml/2006/main">
-            <a:r>
-              <a:t/>
-            </a:r>
-          </a:p>
-          <a:p xmlns:a="http://schemas.openxmlformats.org/drawingml/2006/main">
-            <a:r>
-              <a:t>[기존 서울 합성 교체 시연의 실제 실행 화면]</a:t>
-            </a:r>
-          </a:p>
-          <a:p xmlns:a="http://schemas.openxmlformats.org/drawingml/2006/main">
-            <a:r>
-              <a:t/>
-            </a:r>
-          </a:p>
-          <a:p xmlns:a="http://schemas.openxmlformats.org/drawingml/2006/main">
-            <a:r>
               <a:t>8월 1일부터 수위에 0.2를 더한 시연 자료를 공개했습니다. 오차 감시와 드리프트 감지가 완료됐고 자동 재학습도 완료된 화면입니다. 21일 RMSE가 약 0.0549187로 임계값 0.0172312를 넘었습니다. 다만 후보를 만들었다고 즉시 교체하지는 않았고, 이 캡처에서는 후속 정답 30일을 기다리는 상태였습니다.</a:t>
             </a:r>
           </a:p>
@@ -1965,46 +1765,6 @@
           </a:p>
           <a:p xmlns:a="http://schemas.openxmlformats.org/drawingml/2006/main">
             <a:r>
-              <a:t>[기존 서울 합성 교체 시연의 실제 실행 화면]</a:t>
-            </a:r>
-          </a:p>
-          <a:p xmlns:a="http://schemas.openxmlformats.org/drawingml/2006/main">
-            <a:r>
-              <a:t/>
-            </a:r>
-          </a:p>
-          <a:p xmlns:a="http://schemas.openxmlformats.org/drawingml/2006/main">
-            <a:r>
-              <a:t>[기존 서울 합성 교체 시연의 실제 실행 화면]</a:t>
-            </a:r>
-          </a:p>
-          <a:p xmlns:a="http://schemas.openxmlformats.org/drawingml/2006/main">
-            <a:r>
-              <a:t/>
-            </a:r>
-          </a:p>
-          <a:p xmlns:a="http://schemas.openxmlformats.org/drawingml/2006/main">
-            <a:r>
-              <a:t>[기존 서울 합성 교체 시연의 실제 실행 화면]</a:t>
-            </a:r>
-          </a:p>
-          <a:p xmlns:a="http://schemas.openxmlformats.org/drawingml/2006/main">
-            <a:r>
-              <a:t/>
-            </a:r>
-          </a:p>
-          <a:p xmlns:a="http://schemas.openxmlformats.org/drawingml/2006/main">
-            <a:r>
-              <a:t>[기존 서울 합성 교체 시연의 실제 실행 화면]</a:t>
-            </a:r>
-          </a:p>
-          <a:p xmlns:a="http://schemas.openxmlformats.org/drawingml/2006/main">
-            <a:r>
-              <a:t/>
-            </a:r>
-          </a:p>
-          <a:p xmlns:a="http://schemas.openxmlformats.org/drawingml/2006/main">
-            <a:r>
               <a:t>실제 종로구 품질 이벤트입니다. 오차와 임계값, 재학습 요청 메시지, 발생 시각을 함께 확인할 수 있습니다. 알림은 10월 8일 06시 12분 24초 UTC에 기록됐습니다. 이 알림은 운영 화면과 SQLite 이벤트로 제공하며 외부 메신저를 보냈다고 설명하지 않습니다.</a:t>
             </a:r>
           </a:p>
@@ -2095,46 +1855,6 @@
           </a:p>
           <a:p xmlns:a="http://schemas.openxmlformats.org/drawingml/2006/main">
             <a:r>
-              <a:t>[기존 서울 합성 교체 시연의 실제 실행 화면]</a:t>
-            </a:r>
-          </a:p>
-          <a:p xmlns:a="http://schemas.openxmlformats.org/drawingml/2006/main">
-            <a:r>
-              <a:t/>
-            </a:r>
-          </a:p>
-          <a:p xmlns:a="http://schemas.openxmlformats.org/drawingml/2006/main">
-            <a:r>
-              <a:t>[기존 서울 합성 교체 시연의 실제 실행 화면]</a:t>
-            </a:r>
-          </a:p>
-          <a:p xmlns:a="http://schemas.openxmlformats.org/drawingml/2006/main">
-            <a:r>
-              <a:t/>
-            </a:r>
-          </a:p>
-          <a:p xmlns:a="http://schemas.openxmlformats.org/drawingml/2006/main">
-            <a:r>
-              <a:t>[기존 서울 합성 교체 시연의 실제 실행 화면]</a:t>
-            </a:r>
-          </a:p>
-          <a:p xmlns:a="http://schemas.openxmlformats.org/drawingml/2006/main">
-            <a:r>
-              <a:t/>
-            </a:r>
-          </a:p>
-          <a:p xmlns:a="http://schemas.openxmlformats.org/drawingml/2006/main">
-            <a:r>
-              <a:t>[기존 서울 합성 교체 시연의 실제 실행 화면]</a:t>
-            </a:r>
-          </a:p>
-          <a:p xmlns:a="http://schemas.openxmlformats.org/drawingml/2006/main">
-            <a:r>
-              <a:t/>
-            </a:r>
-          </a:p>
-          <a:p xmlns:a="http://schemas.openxmlformats.org/drawingml/2006/main">
-            <a:r>
               <a:t>알림에 이어 생성된 fine_tune 작업의 실제 기록입니다. 상태는 completed이고 후보 버전은 2입니다. 결과의 awaiting_shadow는 새 정답으로 비교 평가를 기다린다는 뜻입니다. 이때 서빙 모델은 여전히 v1이고 필요한 후속 정답은 30개입니다. 화면을 통해 학습 완료와 배포 완료를 구분할 수 있습니다.</a:t>
             </a:r>
           </a:p>
@@ -2225,46 +1945,6 @@
           </a:p>
           <a:p xmlns:a="http://schemas.openxmlformats.org/drawingml/2006/main">
             <a:r>
-              <a:t>[기존 서울 합성 교체 시연의 실제 실행 화면]</a:t>
-            </a:r>
-          </a:p>
-          <a:p xmlns:a="http://schemas.openxmlformats.org/drawingml/2006/main">
-            <a:r>
-              <a:t/>
-            </a:r>
-          </a:p>
-          <a:p xmlns:a="http://schemas.openxmlformats.org/drawingml/2006/main">
-            <a:r>
-              <a:t>[기존 서울 합성 교체 시연의 실제 실행 화면]</a:t>
-            </a:r>
-          </a:p>
-          <a:p xmlns:a="http://schemas.openxmlformats.org/drawingml/2006/main">
-            <a:r>
-              <a:t/>
-            </a:r>
-          </a:p>
-          <a:p xmlns:a="http://schemas.openxmlformats.org/drawingml/2006/main">
-            <a:r>
-              <a:t>[기존 서울 합성 교체 시연의 실제 실행 화면]</a:t>
-            </a:r>
-          </a:p>
-          <a:p xmlns:a="http://schemas.openxmlformats.org/drawingml/2006/main">
-            <a:r>
-              <a:t/>
-            </a:r>
-          </a:p>
-          <a:p xmlns:a="http://schemas.openxmlformats.org/drawingml/2006/main">
-            <a:r>
-              <a:t>[기존 서울 합성 교체 시연의 실제 실행 화면]</a:t>
-            </a:r>
-          </a:p>
-          <a:p xmlns:a="http://schemas.openxmlformats.org/drawingml/2006/main">
-            <a:r>
-              <a:t/>
-            </a:r>
-          </a:p>
-          <a:p xmlns:a="http://schemas.openxmlformats.org/drawingml/2006/main">
-            <a:r>
               <a:t>[기존·후보 막대와 점선을 가리킨다.]</a:t>
             </a:r>
           </a:p>
@@ -2365,46 +2045,6 @@
           </a:p>
           <a:p xmlns:a="http://schemas.openxmlformats.org/drawingml/2006/main">
             <a:r>
-              <a:t>[기존 서울 합성 교체 시연의 실제 실행 화면]</a:t>
-            </a:r>
-          </a:p>
-          <a:p xmlns:a="http://schemas.openxmlformats.org/drawingml/2006/main">
-            <a:r>
-              <a:t/>
-            </a:r>
-          </a:p>
-          <a:p xmlns:a="http://schemas.openxmlformats.org/drawingml/2006/main">
-            <a:r>
-              <a:t>[기존 서울 합성 교체 시연의 실제 실행 화면]</a:t>
-            </a:r>
-          </a:p>
-          <a:p xmlns:a="http://schemas.openxmlformats.org/drawingml/2006/main">
-            <a:r>
-              <a:t/>
-            </a:r>
-          </a:p>
-          <a:p xmlns:a="http://schemas.openxmlformats.org/drawingml/2006/main">
-            <a:r>
-              <a:t>[기존 서울 합성 교체 시연의 실제 실행 화면]</a:t>
-            </a:r>
-          </a:p>
-          <a:p xmlns:a="http://schemas.openxmlformats.org/drawingml/2006/main">
-            <a:r>
-              <a:t/>
-            </a:r>
-          </a:p>
-          <a:p xmlns:a="http://schemas.openxmlformats.org/drawingml/2006/main">
-            <a:r>
-              <a:t>[기존 서울 합성 교체 시연의 실제 실행 화면]</a:t>
-            </a:r>
-          </a:p>
-          <a:p xmlns:a="http://schemas.openxmlformats.org/drawingml/2006/main">
-            <a:r>
-              <a:t/>
-            </a:r>
-          </a:p>
-          <a:p xmlns:a="http://schemas.openxmlformats.org/drawingml/2006/main">
-            <a:r>
               <a:t>후보 평가, 모델 교체, 현재 모델 서빙을 따로 확인한 화면입니다. 후보 v2가 게이트를 통과해 교체됐고 실제 예측에서도 v2가 사용됐습니다. 등록된 후보가 존재한다는 사실만 확인한 것이 아니라, 최종 응답에 새 모델이 쓰이는 것까지 확인했습니다.</a:t>
             </a:r>
           </a:p>
@@ -2495,46 +2135,6 @@
           </a:p>
           <a:p xmlns:a="http://schemas.openxmlformats.org/drawingml/2006/main">
             <a:r>
-              <a:t>[기존 서울 합성 교체 시연의 실제 실행 화면]</a:t>
-            </a:r>
-          </a:p>
-          <a:p xmlns:a="http://schemas.openxmlformats.org/drawingml/2006/main">
-            <a:r>
-              <a:t/>
-            </a:r>
-          </a:p>
-          <a:p xmlns:a="http://schemas.openxmlformats.org/drawingml/2006/main">
-            <a:r>
-              <a:t>[기존 서울 합성 교체 시연의 실제 실행 화면]</a:t>
-            </a:r>
-          </a:p>
-          <a:p xmlns:a="http://schemas.openxmlformats.org/drawingml/2006/main">
-            <a:r>
-              <a:t/>
-            </a:r>
-          </a:p>
-          <a:p xmlns:a="http://schemas.openxmlformats.org/drawingml/2006/main">
-            <a:r>
-              <a:t>[기존 서울 합성 교체 시연의 실제 실행 화면]</a:t>
-            </a:r>
-          </a:p>
-          <a:p xmlns:a="http://schemas.openxmlformats.org/drawingml/2006/main">
-            <a:r>
-              <a:t/>
-            </a:r>
-          </a:p>
-          <a:p xmlns:a="http://schemas.openxmlformats.org/drawingml/2006/main">
-            <a:r>
-              <a:t>[기존 서울 합성 교체 시연의 실제 실행 화면]</a:t>
-            </a:r>
-          </a:p>
-          <a:p xmlns:a="http://schemas.openxmlformats.org/drawingml/2006/main">
-            <a:r>
-              <a:t/>
-            </a:r>
-          </a:p>
-          <a:p xmlns:a="http://schemas.openxmlformats.org/drawingml/2006/main">
-            <a:r>
               <a:t>같은 시연의 진행 후 예측 화면입니다. 모델 버전은 2이고 9월 1일 입력으로 9월 2일 수위를 약 -21.4740 gl.-m로 예측했습니다. 앞의 v1 화면과 날짜가 다르므로 두 예측값의 차이를 정확도 개선으로 해석하지 않습니다. 정확도 개선은 25쪽의 동일 정답 30일 비교가 근거이고, 이 화면은 교체한 모델이 실제 응답을 만든다는 근거입니다.</a:t>
             </a:r>
           </a:p>
@@ -2625,46 +2225,6 @@
           </a:p>
           <a:p xmlns:a="http://schemas.openxmlformats.org/drawingml/2006/main">
             <a:r>
-              <a:t>[기존 서울 합성 교체 시연의 실제 실행 화면]</a:t>
-            </a:r>
-          </a:p>
-          <a:p xmlns:a="http://schemas.openxmlformats.org/drawingml/2006/main">
-            <a:r>
-              <a:t/>
-            </a:r>
-          </a:p>
-          <a:p xmlns:a="http://schemas.openxmlformats.org/drawingml/2006/main">
-            <a:r>
-              <a:t>[기존 서울 합성 교체 시연의 실제 실행 화면]</a:t>
-            </a:r>
-          </a:p>
-          <a:p xmlns:a="http://schemas.openxmlformats.org/drawingml/2006/main">
-            <a:r>
-              <a:t/>
-            </a:r>
-          </a:p>
-          <a:p xmlns:a="http://schemas.openxmlformats.org/drawingml/2006/main">
-            <a:r>
-              <a:t>[기존 서울 합성 교체 시연의 실제 실행 화면]</a:t>
-            </a:r>
-          </a:p>
-          <a:p xmlns:a="http://schemas.openxmlformats.org/drawingml/2006/main">
-            <a:r>
-              <a:t/>
-            </a:r>
-          </a:p>
-          <a:p xmlns:a="http://schemas.openxmlformats.org/drawingml/2006/main">
-            <a:r>
-              <a:t>[기존 서울 합성 교체 시연의 실제 실행 화면]</a:t>
-            </a:r>
-          </a:p>
-          <a:p xmlns:a="http://schemas.openxmlformats.org/drawingml/2006/main">
-            <a:r>
-              <a:t/>
-            </a:r>
-          </a:p>
-          <a:p xmlns:a="http://schemas.openxmlformats.org/drawingml/2006/main">
-            <a:r>
               <a:t>강수량은 날짜별로 관측되는 이산 자료라 실제 값이 있는 날의 날짜를 표시했습니다. 0mm는 점으로, 결측은 빈칸으로 구분하고 긴 기간은 가로로 이동할 수 있습니다. 이 캡처에서는 8월 27일 강수 3.5mm가 막대로 보이고, 비가 없는 날은 0mm 점으로 보입니다. 운영자가 그래프의 값과 날짜를 함께 읽을 수 있게 개선한 부분입니다.</a:t>
             </a:r>
           </a:p>
@@ -2745,7 +2305,7 @@
           <a:lstStyle xmlns:a="http://schemas.openxmlformats.org/drawingml/2006/main"/>
           <a:p xmlns:a="http://schemas.openxmlformats.org/drawingml/2006/main">
             <a:r>
-              <a:t>기본 화면은 서울 25개 구별 대표 관측소이며 종로를 처음 선택합니다. 현재 확보된 서울 실측은 2024년까지이므로 오늘 기준 예측은 STALE·미준비로 표시합니다. 저장자료 검증 모드를 선택하면 과거 25개 모델을 확인합니다. 전국 실측 3곳은 추가 자료 조회이며 운영 미승인입니다. 같은 관측소 선택이 상세와 모델 관리로 이어지고 실제 전국 강수 지도와 장마 평가를 조회합니다. GIMS 위치만 확보한 1,023개는 기본 지도와 목록에 표시하지 않습니다. 관측소 상세는 Three.js로 최근 실측과 추정 수위를 비교합니다. 전국은 해발 기준면의 수위 비교이고 서울 GL 단면은 별도 개념도입니다. 실제 지층 도면은 없으며 3D를 사용할 수 없으면 2D 비교도로 대체합니다.</a:t>
+              <a:t>기본 화면은 서울 25개 구별 대표 관측소이며 종로를 처음 선택합니다. 서울 추가 실측22,582행을2026년9월30일까지 확보했습니다. 10월1일부터는 합성 확장으로 분리하며 실제 관측 날짜와 모델 입력 날짜를 함께 표시합니다. 저장자료 검증 모드를 선택하면 과거 25개 모델을 확인합니다. 전국 실측3곳과 전국17시도 합성 시뮬레이션은 별도 자료 범위이며 운영 미승인입니다. 최신HTTP에서서울25곳중23곳 모델준비,전국실측3곳중1곳,합성17곳중16곳이 모델준비입니다. 서울2곳은과거날짜공백을채우지않았고합성1곳은초기게이트탈락으로persistence를표시합니다. 자료조회가능과모델준비를구분합니다. 같은 관측소 선택이 상세와 모델 관리로 이어지고 실제 전국 강수 지도와 장마 평가를 조회합니다. GIMS 위치만 확보한 1,023개는 기본 지도와 목록에 표시하지 않습니다. 관측소 상세는 Three.js로 최근 실측과 추정 수위를 비교합니다. 전국은 해발 기준면의 수위 비교이고 서울 GL 단면은 별도 개념도입니다. 실제 지층 도면은 없으며 3D를 사용할 수 없으면 2D 비교도로 대체합니다.</a:t>
             </a:r>
           </a:p>
           <a:p xmlns:a="http://schemas.openxmlformats.org/drawingml/2006/main">
@@ -2905,7 +2465,7 @@
           <a:lstStyle xmlns:a="http://schemas.openxmlformats.org/drawingml/2006/main"/>
           <a:p xmlns:a="http://schemas.openxmlformats.org/drawingml/2006/main">
             <a:r>
-              <a:t>서울 25개 구별 대표 관측소가 기본 서비스입니다. GIMS 참고 위치 1,023곳은 확보 목록만 보존하며 기본 지도에서 제외합니다. 서울 25곳을 합한 1,048개는 원천 목록 수이며 서비스 범위가 아닙니다. 광주도척, 무안무안, 제주조천 세 곳은 2026년 1월1일부터 10월7일까지 각각 280일 실측을 확보했습니다. AWS 일자료는 280일 201,206건, ID 합집합 728곳입니다. 장마 통계는 66지점 54년 3,564행을 평가 전용으로 사용합니다. 위치 목록의 표준화 테스트 레이어 한계와 미확인 지점은 별도 상태로 남깁니다.</a:t>
+              <a:t>서울 25개 구별 대표 관측소가 기본 서비스입니다. GIMS 참고 위치 1,023곳은 확보 목록만 보존하며 기본 지도에서 제외합니다. 서울 25곳을 합한 1,048개는 원천 목록 수이며 서비스 범위가 아닙니다. 광주도척, 무안무안, 제주조천 세 곳은 2026년 1월1일부터 10월7일까지 각각 280일 실측을 확보했습니다. AWS 일자료는280일201,206건입니다. API허브 ASOS 활용 승인과 실제 응답을 확인했습니다. ASOS2020~2025년 원천은 유효2,731행·결측3,845행으로 연속6년 모델 입력이 아닙니다. 원천 음수 결측은0으로 채우지 않습니다. 전국17시도 수위·강수는 합성 시나리오이며 실측3곳과 분리합니다. 장마 통계는 66지점 54년 3,564행을 평가 전용으로 사용합니다. 위치 목록의 표준화 테스트 레이어 한계와 미확인 지점은 별도 상태로 남깁니다.</a:t>
             </a:r>
           </a:p>
           <a:p xmlns:a="http://schemas.openxmlformats.org/drawingml/2006/main">
@@ -3065,7 +2625,7 @@
           <a:lstStyle xmlns:a="http://schemas.openxmlformats.org/drawingml/2006/main"/>
           <a:p xmlns:a="http://schemas.openxmlformats.org/drawingml/2006/main">
             <a:r>
-              <a:t>M0는 최근20일 수위·강수의 두 채널입니다. M1은 같은 시계열에3·7·14일 누적강수, 최대20일 연속강수일수, 연중sin/cos 등6개 요약특징을 추가합니다. 실제 장마 시작·종료일은 사후에 확정되므로 모델 입력으로 넣지 않고 평가 그룹을 나누는 데만 사용합니다. 두 모델 모두 학습 종료는5월31일, 튜닝 검증은6월, 최종 비교는7월1일부터10월7일99개 정답으로 고정했습니다. scaler와 강한 강수 P95도 학습 구간만 사용합니다.</a:t>
+              <a:t>M0는 최근20일 수위·강수의 두 채널입니다. M1은 같은 시계열에3·7·14일 누적강수, 최대20일 연속강수일수, 연중sin/cos 등6개 요약특징을 추가합니다. 실제 장마 시작·종료일은 사후에 확정되므로 모델 입력으로 넣지 않고 평가 그룹을 나누는 데만 사용합니다. 실측 두 모델은 학습 종료5월31일, 튜닝 검증6월, 최종 비교7월1일~10월7일99정답으로 고정했습니다. 별도 합성17시도는 학습2022~2023년, 검증2024년1~3월, 평가2024년4월1일~2025년12월31일640정답입니다. 합성 장마는 매년6월20일~7월25일 시나리오로 정하며 공식 장마 통계가 아닙니다. scaler와 강한 강수 P95도 학습 구간만 사용합니다.</a:t>
             </a:r>
           </a:p>
           <a:p xmlns:a="http://schemas.openxmlformats.org/drawingml/2006/main">
@@ -3145,7 +2705,7 @@
           <a:lstStyle xmlns:a="http://schemas.openxmlformats.org/drawingml/2006/main"/>
           <a:p xmlns:a="http://schemas.openxmlformats.org/drawingml/2006/main">
             <a:r>
-              <a:t>표는 공통 최종 평가99정답의 RMSE입니다. 감소율이 양수면 M1이 M0보다 좋습니다. 제주 M1은 M0보다 전체29.43%, 장마52.27%좋지만 전체 persistence보다 약0.71%나쁩니다. 제주 장마는19개 정답뿐이므로30개 계절 게이트를 충족하지 않습니다. 무안과 광주에서는 M1이 더 나빴습니다. 따라서 강수 특징을 넣으면 무조건 더 좋아진다고 결론내리지 않고, 기존 모델보다 나쁜 후보는 교체하지 않습니다.</a:t>
+              <a:t>표는 공통 최종 평가99정답의 RMSE입니다. 감소율이 양수면 M1이 M0보다 좋습니다. 제주 M1은 M0보다 전체29.43%, 장마52.27%좋지만 전체 persistence보다 약0.71%나쁩니다. 제주 장마는19개 정답뿐이므로30개 계절 게이트를 충족하지 않습니다. 무안과 광주에서는 M1이 더 나빴습니다. 별도 합성17곳34모델의640일 평가도 완료했습니다. 전체 pooled RMSE는M0 0.04083450에서M1 0.04066274로 줄고16곳이 미세 개선했지만5%개선 지점은0곳입니다. 합성 장마72정답/지점의pooled RMSE는0.09114846에서0.09118669로 악화됐고 강한 강수618개 합계도0.12931976에서0.12972571로 악화됐습니다. 합성 시나리오에서 장마 개선을 입증하지 못했고 실측 운영 승격 근거로 사용하지 않습니다. 따라서 강수 특징을 넣으면 무조건 더 좋아진다고 결론내리지 않고, 나쁜 후보는 교체하지 않습니다.</a:t>
             </a:r>
           </a:p>
           <a:p xmlns:a="http://schemas.openxmlformats.org/drawingml/2006/main">
@@ -3155,7 +2715,7 @@
           </a:p>
           <a:p xmlns:a="http://schemas.openxmlformats.org/drawingml/2006/main">
             <a:r>
-              <a:t>근거: evidence/records/2026-10-08-national/seasonal-evaluation.json</a:t>
+              <a:t>근거: evidence/records/2026-10-08-national/seasonal-evaluation.json; synthetic-seasonal-evaluation.json; synthetic-seasonal-summary.json</a:t>
             </a:r>
           </a:p>
         </p:txBody>
@@ -3225,7 +2785,7 @@
           <a:lstStyle xmlns:a="http://schemas.openxmlformats.org/drawingml/2006/main"/>
           <a:p xmlns:a="http://schemas.openxmlformats.org/drawingml/2006/main">
             <a:r>
-              <a:t>API 원본 검증 후3개 지하수 관측소와 완료 일강수를 D−1기준으로 수집합니다. 기본Compose에서는 전국 scheduler와 실험 감시가 활성화됩니다. 실제 발행 예측에 정답이 연결되면21일RMSE를 매일 계산하고 연속2회 초과,21일대기,41일자료 조건에서 후보를 학습합니다. 새 정답30일 비교와5%개선·guard 조건을 만족해야 합니다. 현재3곳은실험 연결이므로 운영 승격은 차단됩니다. D−1자료로D에발행하는값은입력기준1일후의당일추정이며발행일기준내일예측이아닙니다. 오늘 내려받은 과거자료로 당시 예측을 발행한 것처럼 소급하지 않습니다.</a:t>
+              <a:t>API 원본 검증 후3개 지하수 관측소와 완료 일강수를 D−1기준으로 수집합니다. 기본Compose에서는 전국 scheduler와 실험 감시가 활성화됩니다. 실제 발행 예측에 정답이 연결되면21일RMSE를 매일 계산하고 연속2회 초과,21일대기,41일자료 조건에서 후보를 학습합니다. 새 정답30일 비교와5%개선·guard 조건을 만족해야 합니다. 현재3곳은실험 연결이므로 운영 승격은 차단됩니다. 동결guard의 계절 표본이 부족한M1후보는 회복 불가능한 조건이므로 즉시 만료합니다. 그외 후속 정답 대기는90일 상한으로 만료해 영구 대기를 방지합니다. 합성 미래30일 공개 실험은 검증용이며 실제 미래30일 운영 실증이 아닙니다. D−1자료로D에발행하는값은입력기준1일후의당일추정이며발행일기준내일예측이아닙니다. 오늘 내려받은 과거자료로 당시 예측을 발행한 것처럼 소급하지 않습니다.</a:t>
             </a:r>
           </a:p>
           <a:p xmlns:a="http://schemas.openxmlformats.org/drawingml/2006/main">
@@ -3305,7 +2865,7 @@
           <a:lstStyle xmlns:a="http://schemas.openxmlformats.org/drawingml/2006/main"/>
           <a:p xmlns:a="http://schemas.openxmlformats.org/drawingml/2006/main">
             <a:r>
-              <a:t>기존v1시연 API는 호환 경로로 유지하고 사용자 화면은v2network읽기계약을 통해 같은 관측소목록을 봅니다. network history는수위와연결강수, pipeline은모델·감시·장마평가·수집상태를 제공합니다. Compose컨테이너 안에서API와영속worker를 실행하고재기동 후완료모델을중복학습하지 않습니다. 최종 Docker 테스트는 201개 통과·1개 skip이고 프런트는 23개 테스트와 빌드를 통과했습니다.</a:t>
+              <a:t>기존v1시연 API는 호환 경로로 유지하고 사용자 화면은v2network읽기계약을 통해 같은 관측소목록을 봅니다. network history는수위와연결강수, pipeline은모델·감시·장마평가·수집상태를 제공합니다. Compose컨테이너 안에서API와영속worker를 실행하고재기동 후완료모델을중복학습하지 않습니다. 이번 전체 컨테이너 테스트226개 통과·1skip과 프런트30개 테스트·빌드를 확인했습니다. 최종Docker healthy와브라우저화면을확인했습니다. 재기동후34완료모델·17관측소·29,597합성행·58작업이보존되고중복학습되지않았습니다. 이 실행 검증은 실제 미래 정답30일이나 운영 승격 근거는 아닙니다.</a:t>
             </a:r>
           </a:p>
           <a:p xmlns:a="http://schemas.openxmlformats.org/drawingml/2006/main">
@@ -3385,7 +2945,7 @@
           <a:lstStyle xmlns:a="http://schemas.openxmlformats.org/drawingml/2006/main"/>
           <a:p xmlns:a="http://schemas.openxmlformats.org/drawingml/2006/main">
             <a:r>
-              <a:t>기본 서비스는 서울 25개 구별 대표 관측소 관제입니다. 최신 확보 자료가 2024년까지이므로 오늘 기준 예측은 STALE이며 저장자료 검증 모드에서는 과거 25개 모델을 조회합니다. 전국 3곳의 280일 실측과 LSTM 1곳·persistence 2곳은 운영 미승인 추가 조회입니다. GIMS 위치 목록은 기본 화면에서 제외합니다. 미연결 예보와 미확인 특보는 화면에서 제외하되 원천 샘플은 보존합니다. 실제 발행 이후 정답 30일 평가와 현장 운영 승인은 아직 추가 검증 대상입니다.</a:t>
+              <a:t>기본 서비스는 서울 25개 구별 대표 관측소 관제입니다. 서울 추가 실측은9월30일까지 확보했으며10월1일 이후는 합성 시연으로 분리합니다. 추가 실측의 기존 모델 재평가는 완료로 주장하지 않습니다. 전국 3곳의 280일 실측과 LSTM 1곳·persistence 2곳은 운영 미승인 추가 조회입니다. GIMS 위치 목록은 기본 화면에서 제외합니다. 미연결 예보와 미확인 특보는 화면에서 제외하되 원천 샘플은 보존합니다. 실제 발행 이후 정답 30일 평가와 현장 운영 승인은 아직 추가 검증 대상입니다.</a:t>
             </a:r>
           </a:p>
           <a:p xmlns:a="http://schemas.openxmlformats.org/drawingml/2006/main">
@@ -3555,6 +3115,16 @@
           </a:p>
           <a:p xmlns:a="http://schemas.openxmlformats.org/drawingml/2006/main">
             <a:r>
+              <a:t>공식 가이드17~18쪽의8개 도메인 매핑 항목을 유지했습니다. 이해관계자는 지하수 관측·시설 유지관리 기업의 업무·모델 운영자로 제안합니다.</a:t>
+            </a:r>
+          </a:p>
+          <a:p xmlns:a="http://schemas.openxmlformats.org/drawingml/2006/main">
+            <a:r>
+              <a:t/>
+            </a:r>
+          </a:p>
+          <a:p xmlns:a="http://schemas.openxmlformats.org/drawingml/2006/main">
+            <a:r>
               <a:t>근거:[object Object]</a:t>
             </a:r>
           </a:p>
@@ -3625,7 +3195,7 @@
           <a:lstStyle xmlns:a="http://schemas.openxmlformats.org/drawingml/2006/main"/>
           <a:p xmlns:a="http://schemas.openxmlformats.org/drawingml/2006/main">
             <a:r>
-              <a:t>현재 확인할 수 있는 결과는 관측소별 다음 날 수위 예측과 모델 운영 상태입니다. 기본 시연 자료에는 공식 과거 관측과 별도로 구분한 합성 확장이 포함됩니다. 현장 적용을 위해서는 관측소의 적합성과 수위 변화의 원인, 실제 업무 시간이나 비용 효과를 추가로 검증해야 합니다. 싱크홀 발생 확률이나 안전 등급을 산출했다고 설명하지 않습니다. 지자체 직접 도입과 시공사 대상 확장도 구분하고 있습니다.</a:t>
+              <a:t>현재 확인할 수 있는 결과는 관측소별 다음 날 수위 예측과 모델 운영 상태입니다. 기본 시연 자료에는 공식 과거 관측과 별도로 구분한 합성 확장이 포함됩니다. 현장 적용을 위해서는 관측소의 적합성과 수위 변화의 원인, 실제 업무 시간이나 비용 효과를 추가로 검증해야 합니다. 싱크홀 발생 확률이나 안전 등급을 산출했다고 설명하지 않습니다. B2B는 관측·시설 유지관리 기업에 제안하고 공공기관은 협업 대상으로 구분합니다. 도입·계약·매출 실적은 확인하지 않았습니다.</a:t>
             </a:r>
           </a:p>
           <a:p xmlns:a="http://schemas.openxmlformats.org/drawingml/2006/main">
@@ -5778,12 +5348,12 @@
   </p:cSld>
   <p:clrMap bg1="lt1" tx1="dk1" bg2="lt2" tx2="dk2" accent1="accent1" accent2="accent2" accent3="accent3" accent4="accent4" accent5="accent5" accent6="accent6" hlink="hlink" folHlink="folHlink"/>
   <p:sldLayoutIdLst>
-    <p:sldLayoutId xmlns:r="http://schemas.openxmlformats.org/officeDocument/2006/relationships" id="2147483649" r:id="Rb2cece90ec414573"/>
-    <p:sldLayoutId xmlns:r="http://schemas.openxmlformats.org/officeDocument/2006/relationships" id="2147483650" r:id="R8cbcb5b8efcf44e4"/>
-    <p:sldLayoutId xmlns:r="http://schemas.openxmlformats.org/officeDocument/2006/relationships" id="2147483651" r:id="Re6953763173f4e9b"/>
-    <p:sldLayoutId xmlns:r="http://schemas.openxmlformats.org/officeDocument/2006/relationships" id="2147483652" r:id="Rbc984f1960614930"/>
-    <p:sldLayoutId xmlns:r="http://schemas.openxmlformats.org/officeDocument/2006/relationships" id="2147483653" r:id="R9400d020df904bde"/>
-    <p:sldLayoutId xmlns:r="http://schemas.openxmlformats.org/officeDocument/2006/relationships" id="2147483654" r:id="Rfcb4913bef8c4e5c"/>
+    <p:sldLayoutId xmlns:r="http://schemas.openxmlformats.org/officeDocument/2006/relationships" id="2147483649" r:id="Re42d1b5fbff84051"/>
+    <p:sldLayoutId xmlns:r="http://schemas.openxmlformats.org/officeDocument/2006/relationships" id="2147483650" r:id="Rbfeb3a998dda4aa2"/>
+    <p:sldLayoutId xmlns:r="http://schemas.openxmlformats.org/officeDocument/2006/relationships" id="2147483651" r:id="R3f6d15a6f2ba44dc"/>
+    <p:sldLayoutId xmlns:r="http://schemas.openxmlformats.org/officeDocument/2006/relationships" id="2147483652" r:id="R95b6f597e99848db"/>
+    <p:sldLayoutId xmlns:r="http://schemas.openxmlformats.org/officeDocument/2006/relationships" id="2147483653" r:id="Rdcda1979136f484c"/>
+    <p:sldLayoutId xmlns:r="http://schemas.openxmlformats.org/officeDocument/2006/relationships" id="2147483654" r:id="R67718d3bde59481b"/>
   </p:sldLayoutIdLst>
   <p:txStyles>
     <p:titleStyle>
@@ -7362,7 +6932,7 @@
           <p:cNvPr id="5" name="">
             <a:extLst xmlns:a="http://schemas.openxmlformats.org/drawingml/2006/main">
               <a:ext uri="{FF2B5EF4-FFF2-40B4-BE49-F238E27FC236}">
-                <a16:creationId xmlns:a16="http://schemas.microsoft.com/office/drawing/2014/main" id="{40DD76A5-5398-46FB-9819-EC20ADE42FE1}"/>
+                <a16:creationId xmlns:a16="http://schemas.microsoft.com/office/drawing/2014/main" id="{B7850218-5E60-45A9-9D56-4DDA9A1C288B}"/>
               </a:ext>
             </a:extLst>
           </p:cNvPr>
@@ -8121,7 +7691,7 @@
           <p:cNvPr id="5" name="">
             <a:extLst xmlns:a="http://schemas.openxmlformats.org/drawingml/2006/main">
               <a:ext uri="{FF2B5EF4-FFF2-40B4-BE49-F238E27FC236}">
-                <a16:creationId xmlns:a16="http://schemas.microsoft.com/office/drawing/2014/main" id="{57E73F65-D526-4704-9898-EADC4EDD4620}"/>
+                <a16:creationId xmlns:a16="http://schemas.microsoft.com/office/drawing/2014/main" id="{758426FA-287F-4E4C-B6D8-D81B44827BD5}"/>
               </a:ext>
             </a:extLst>
           </p:cNvPr>
@@ -9070,7 +8640,7 @@
           <p:cNvPr id="7" name="">
             <a:extLst xmlns:a="http://schemas.openxmlformats.org/drawingml/2006/main">
               <a:ext uri="{FF2B5EF4-FFF2-40B4-BE49-F238E27FC236}">
-                <a16:creationId xmlns:a16="http://schemas.microsoft.com/office/drawing/2014/main" id="{23E7FD8A-288D-45AF-BF14-0ACD2DBF4876}"/>
+                <a16:creationId xmlns:a16="http://schemas.microsoft.com/office/drawing/2014/main" id="{3E5321AD-B9AF-4850-BE6D-9F8FEFE00DE2}"/>
               </a:ext>
             </a:extLst>
           </p:cNvPr>
@@ -9197,7 +8767,7 @@
           <p:cNvPr id="9" name="">
             <a:extLst xmlns:a="http://schemas.openxmlformats.org/drawingml/2006/main">
               <a:ext uri="{FF2B5EF4-FFF2-40B4-BE49-F238E27FC236}">
-                <a16:creationId xmlns:a16="http://schemas.microsoft.com/office/drawing/2014/main" id="{3DF79FA3-0C20-4A34-9111-357168ABBE70}"/>
+                <a16:creationId xmlns:a16="http://schemas.microsoft.com/office/drawing/2014/main" id="{5D118A56-3E30-4D5A-A279-EE1F4BBB4CB3}"/>
               </a:ext>
             </a:extLst>
           </p:cNvPr>
@@ -9324,7 +8894,7 @@
           <p:cNvPr id="11" name="">
             <a:extLst xmlns:a="http://schemas.openxmlformats.org/drawingml/2006/main">
               <a:ext uri="{FF2B5EF4-FFF2-40B4-BE49-F238E27FC236}">
-                <a16:creationId xmlns:a16="http://schemas.microsoft.com/office/drawing/2014/main" id="{AA9674A4-1287-467E-8D5E-3C95DADC5518}"/>
+                <a16:creationId xmlns:a16="http://schemas.microsoft.com/office/drawing/2014/main" id="{4C2AD805-D23E-4383-8770-F19E350E32CC}"/>
               </a:ext>
             </a:extLst>
           </p:cNvPr>
@@ -9451,7 +9021,7 @@
           <p:cNvPr id="13" name="">
             <a:extLst xmlns:a="http://schemas.openxmlformats.org/drawingml/2006/main">
               <a:ext uri="{FF2B5EF4-FFF2-40B4-BE49-F238E27FC236}">
-                <a16:creationId xmlns:a16="http://schemas.microsoft.com/office/drawing/2014/main" id="{821FEA04-FC86-4ACA-B320-A22839C2BC51}"/>
+                <a16:creationId xmlns:a16="http://schemas.microsoft.com/office/drawing/2014/main" id="{E3EFB272-C486-43E3-B32E-702C744B9317}"/>
               </a:ext>
             </a:extLst>
           </p:cNvPr>
@@ -9578,7 +9148,7 @@
           <p:cNvPr id="15" name="">
             <a:extLst xmlns:a="http://schemas.openxmlformats.org/drawingml/2006/main">
               <a:ext uri="{FF2B5EF4-FFF2-40B4-BE49-F238E27FC236}">
-                <a16:creationId xmlns:a16="http://schemas.microsoft.com/office/drawing/2014/main" id="{97815F61-AF88-4918-B882-2071FB36B433}"/>
+                <a16:creationId xmlns:a16="http://schemas.microsoft.com/office/drawing/2014/main" id="{B348C069-75B0-4DF3-884C-2A30D38FF6C4}"/>
               </a:ext>
             </a:extLst>
           </p:cNvPr>
@@ -9965,7 +9535,7 @@
           <p:cNvPr id="5" name="">
             <a:extLst xmlns:a="http://schemas.openxmlformats.org/drawingml/2006/main">
               <a:ext uri="{FF2B5EF4-FFF2-40B4-BE49-F238E27FC236}">
-                <a16:creationId xmlns:a16="http://schemas.microsoft.com/office/drawing/2014/main" id="{313005CB-04FE-458E-83D9-EAA33BE58306}"/>
+                <a16:creationId xmlns:a16="http://schemas.microsoft.com/office/drawing/2014/main" id="{B2583A35-4C6B-4D42-BD30-EFC76C016A81}"/>
               </a:ext>
             </a:extLst>
           </p:cNvPr>
@@ -11010,7 +10580,7 @@
           <p:cNvPr id="9" name="">
             <a:extLst xmlns:a="http://schemas.openxmlformats.org/drawingml/2006/main">
               <a:ext uri="{FF2B5EF4-FFF2-40B4-BE49-F238E27FC236}">
-                <a16:creationId xmlns:a16="http://schemas.microsoft.com/office/drawing/2014/main" id="{5AE7AD11-8290-4C30-B897-D1D637AFC65A}"/>
+                <a16:creationId xmlns:a16="http://schemas.microsoft.com/office/drawing/2014/main" id="{0C53E3C2-734F-4BC4-B398-14CDECB3B18E}"/>
               </a:ext>
             </a:extLst>
           </p:cNvPr>
@@ -11137,7 +10707,7 @@
           <p:cNvPr id="11" name="">
             <a:extLst xmlns:a="http://schemas.openxmlformats.org/drawingml/2006/main">
               <a:ext uri="{FF2B5EF4-FFF2-40B4-BE49-F238E27FC236}">
-                <a16:creationId xmlns:a16="http://schemas.microsoft.com/office/drawing/2014/main" id="{98450ADC-3F5E-4CA7-A86A-6D358E80CFB6}"/>
+                <a16:creationId xmlns:a16="http://schemas.microsoft.com/office/drawing/2014/main" id="{B77AAF4E-0BC3-4A0E-BB2A-588E51DB87CC}"/>
               </a:ext>
             </a:extLst>
           </p:cNvPr>
@@ -11264,7 +10834,7 @@
           <p:cNvPr id="13" name="">
             <a:extLst xmlns:a="http://schemas.openxmlformats.org/drawingml/2006/main">
               <a:ext uri="{FF2B5EF4-FFF2-40B4-BE49-F238E27FC236}">
-                <a16:creationId xmlns:a16="http://schemas.microsoft.com/office/drawing/2014/main" id="{6E21EC15-7C03-4CFF-BEF2-A5AE3BBA1269}"/>
+                <a16:creationId xmlns:a16="http://schemas.microsoft.com/office/drawing/2014/main" id="{4F53A4F4-83C4-4DE2-9FED-7DA163BA23EF}"/>
               </a:ext>
             </a:extLst>
           </p:cNvPr>
@@ -11391,7 +10961,7 @@
           <p:cNvPr id="15" name="">
             <a:extLst xmlns:a="http://schemas.openxmlformats.org/drawingml/2006/main">
               <a:ext uri="{FF2B5EF4-FFF2-40B4-BE49-F238E27FC236}">
-                <a16:creationId xmlns:a16="http://schemas.microsoft.com/office/drawing/2014/main" id="{20523966-F567-4414-8182-780085B59C4E}"/>
+                <a16:creationId xmlns:a16="http://schemas.microsoft.com/office/drawing/2014/main" id="{3140380D-0E1C-42FE-9DBD-A8BA0905BDDE}"/>
               </a:ext>
             </a:extLst>
           </p:cNvPr>
@@ -11518,7 +11088,7 @@
           <p:cNvPr id="17" name="">
             <a:extLst xmlns:a="http://schemas.openxmlformats.org/drawingml/2006/main">
               <a:ext uri="{FF2B5EF4-FFF2-40B4-BE49-F238E27FC236}">
-                <a16:creationId xmlns:a16="http://schemas.microsoft.com/office/drawing/2014/main" id="{ADCAE7FE-2F9A-4938-A39D-5C4D52394382}"/>
+                <a16:creationId xmlns:a16="http://schemas.microsoft.com/office/drawing/2014/main" id="{50DDB536-B012-440A-92B3-8D657752A48C}"/>
               </a:ext>
             </a:extLst>
           </p:cNvPr>
@@ -11621,7 +11191,7 @@
           <p:cNvPr id="19" name="">
             <a:extLst xmlns:a="http://schemas.openxmlformats.org/drawingml/2006/main">
               <a:ext uri="{FF2B5EF4-FFF2-40B4-BE49-F238E27FC236}">
-                <a16:creationId xmlns:a16="http://schemas.microsoft.com/office/drawing/2014/main" id="{36CBC069-5694-4CFB-90FB-CE2E20959BE0}"/>
+                <a16:creationId xmlns:a16="http://schemas.microsoft.com/office/drawing/2014/main" id="{C9FC9DFD-546D-4918-8ADE-2BF7FAAA1894}"/>
               </a:ext>
             </a:extLst>
           </p:cNvPr>
@@ -12198,7 +11768,7 @@
           <p:cNvPr id="7" name="">
             <a:extLst xmlns:a="http://schemas.openxmlformats.org/drawingml/2006/main">
               <a:ext uri="{FF2B5EF4-FFF2-40B4-BE49-F238E27FC236}">
-                <a16:creationId xmlns:a16="http://schemas.microsoft.com/office/drawing/2014/main" id="{81007841-3E95-4EA0-9626-B7B6FD531730}"/>
+                <a16:creationId xmlns:a16="http://schemas.microsoft.com/office/drawing/2014/main" id="{7937D014-35EF-4345-A05E-70ABA4A73220}"/>
               </a:ext>
             </a:extLst>
           </p:cNvPr>
@@ -12325,7 +11895,7 @@
           <p:cNvPr id="9" name="">
             <a:extLst xmlns:a="http://schemas.openxmlformats.org/drawingml/2006/main">
               <a:ext uri="{FF2B5EF4-FFF2-40B4-BE49-F238E27FC236}">
-                <a16:creationId xmlns:a16="http://schemas.microsoft.com/office/drawing/2014/main" id="{EFD5B6F5-0A61-4527-AABA-61F4463C916C}"/>
+                <a16:creationId xmlns:a16="http://schemas.microsoft.com/office/drawing/2014/main" id="{4D40E432-9143-4166-9A60-BC9E881A1F06}"/>
               </a:ext>
             </a:extLst>
           </p:cNvPr>
@@ -12452,7 +12022,7 @@
           <p:cNvPr id="11" name="">
             <a:extLst xmlns:a="http://schemas.openxmlformats.org/drawingml/2006/main">
               <a:ext uri="{FF2B5EF4-FFF2-40B4-BE49-F238E27FC236}">
-                <a16:creationId xmlns:a16="http://schemas.microsoft.com/office/drawing/2014/main" id="{82BE3665-DE7C-4F75-896A-A3C4C6BFC1AC}"/>
+                <a16:creationId xmlns:a16="http://schemas.microsoft.com/office/drawing/2014/main" id="{DDE059A5-5482-4987-851B-2E49CA8735BE}"/>
               </a:ext>
             </a:extLst>
           </p:cNvPr>
@@ -12579,7 +12149,7 @@
           <p:cNvPr id="13" name="">
             <a:extLst xmlns:a="http://schemas.openxmlformats.org/drawingml/2006/main">
               <a:ext uri="{FF2B5EF4-FFF2-40B4-BE49-F238E27FC236}">
-                <a16:creationId xmlns:a16="http://schemas.microsoft.com/office/drawing/2014/main" id="{44BDB2E4-AFD3-4878-8547-FB30E9393731}"/>
+                <a16:creationId xmlns:a16="http://schemas.microsoft.com/office/drawing/2014/main" id="{B70CFEAA-56C6-4CCF-B2A9-F78710052028}"/>
               </a:ext>
             </a:extLst>
           </p:cNvPr>
@@ -12706,7 +12276,7 @@
           <p:cNvPr id="15" name="">
             <a:extLst xmlns:a="http://schemas.openxmlformats.org/drawingml/2006/main">
               <a:ext uri="{FF2B5EF4-FFF2-40B4-BE49-F238E27FC236}">
-                <a16:creationId xmlns:a16="http://schemas.microsoft.com/office/drawing/2014/main" id="{B17E8B35-0808-4F55-8BA5-C4B9A47C67F0}"/>
+                <a16:creationId xmlns:a16="http://schemas.microsoft.com/office/drawing/2014/main" id="{46BFE743-D3DC-43F0-AC8F-A11DCFD1E033}"/>
               </a:ext>
             </a:extLst>
           </p:cNvPr>
@@ -13112,7 +12682,7 @@
           <p:cNvPr id="5" name="">
             <a:extLst xmlns:a="http://schemas.openxmlformats.org/drawingml/2006/main">
               <a:ext uri="{FF2B5EF4-FFF2-40B4-BE49-F238E27FC236}">
-                <a16:creationId xmlns:a16="http://schemas.microsoft.com/office/drawing/2014/main" id="{28E0AD4F-4E40-4433-A078-8C0688629590}"/>
+                <a16:creationId xmlns:a16="http://schemas.microsoft.com/office/drawing/2014/main" id="{6BF12C29-D81B-41E6-A71B-A8E242EEFCB2}"/>
               </a:ext>
             </a:extLst>
           </p:cNvPr>
@@ -14976,7 +14546,7 @@
           <p:cNvPr id="5" name="">
             <a:extLst xmlns:a="http://schemas.openxmlformats.org/drawingml/2006/main">
               <a:ext uri="{FF2B5EF4-FFF2-40B4-BE49-F238E27FC236}">
-                <a16:creationId xmlns:a16="http://schemas.microsoft.com/office/drawing/2014/main" id="{12D420A1-AD75-419D-9438-EAABC26FBC69}"/>
+                <a16:creationId xmlns:a16="http://schemas.microsoft.com/office/drawing/2014/main" id="{296AEBCF-6E5A-4800-8254-EC93208AC7A6}"/>
               </a:ext>
             </a:extLst>
           </p:cNvPr>
@@ -15758,7 +15328,7 @@
           <p:cNvPr id="5" name="">
             <a:extLst xmlns:a="http://schemas.openxmlformats.org/drawingml/2006/main">
               <a:ext uri="{FF2B5EF4-FFF2-40B4-BE49-F238E27FC236}">
-                <a16:creationId xmlns:a16="http://schemas.microsoft.com/office/drawing/2014/main" id="{A950DECF-2EDA-4ADA-B7BB-41AD0FEA891C}"/>
+                <a16:creationId xmlns:a16="http://schemas.microsoft.com/office/drawing/2014/main" id="{B5FFD8CA-2D17-4A4D-A3D6-433BB281E2BE}"/>
               </a:ext>
             </a:extLst>
           </p:cNvPr>
@@ -16589,7 +16159,7 @@
                 <a:ea typeface="NanumGothic"/>
                 <a:cs typeface="NanumGothic"/>
               </a:rPr>
-              <a:t>업무 담당자</a:t>
+              <a:t>기업 업무 담당자</a:t>
             </a:r>
           </a:p>
         </p:txBody>
@@ -16961,7 +16531,75 @@
                 <a:ea typeface="NanumGothic"/>
                 <a:cs typeface="NanumGothic"/>
               </a:rPr>
-              <a:t>목표 사용자: 지하수 업무 담당자 · AI 서비스 운영자</a:t>
+              <a:t>B2B 제안 고객: 지하수 관측·시설 유지관리 기업</a:t>
+            </a:r>
+          </a:p>
+        </p:txBody>
+      </p:sp>
+      <p:sp>
+        <p:nvSpPr>
+          <p:cNvPr id="11" name="">
+            <a:extLst xmlns:a="http://schemas.openxmlformats.org/drawingml/2006/main">
+              <a:ext uri="{FF2B5EF4-FFF2-40B4-BE49-F238E27FC236}">
+                <a16:creationId xmlns:a16="http://schemas.microsoft.com/office/drawing/2014/main" id="{A99E0261-F9F9-4D80-B954-D79A1A6B79B3}"/>
+              </a:ext>
+            </a:extLst>
+          </p:cNvPr>
+          <p:cNvSpPr>
+            <a:spLocks xmlns:a="http://schemas.openxmlformats.org/drawingml/2006/main" noGrp="1"/>
+          </p:cNvSpPr>
+          <p:nvPr/>
+        </p:nvSpPr>
+        <p:spPr>
+          <a:xfrm xmlns:a="http://schemas.openxmlformats.org/drawingml/2006/main">
+            <a:off x="571500" y="4295775"/>
+            <a:ext cx="8001000" cy="266700"/>
+          </a:xfrm>
+          <a:prstGeom xmlns:a="http://schemas.openxmlformats.org/drawingml/2006/main" prst="rect">
+            <a:avLst/>
+          </a:prstGeom>
+          <a:noFill xmlns:a="http://schemas.openxmlformats.org/drawingml/2006/main"/>
+          <a:ln xmlns:a="http://schemas.openxmlformats.org/drawingml/2006/main" w="0">
+            <a:noFill/>
+          </a:ln>
+        </p:spPr>
+        <p:txBody>
+          <a:bodyPr xmlns:a="http://schemas.openxmlformats.org/drawingml/2006/main">
+            <a:noAutofit/>
+          </a:bodyPr>
+          <a:lstStyle xmlns:a="http://schemas.openxmlformats.org/drawingml/2006/main">
+            <a:defPPr>
+              <a:defRPr sz="1200" b="0">
+                <a:solidFill>
+                  <a:srgbClr val="5C686B"/>
+                </a:solidFill>
+                <a:latin typeface="NanumGothic"/>
+                <a:ea typeface="NanumGothic"/>
+                <a:cs typeface="NanumGothic"/>
+              </a:defRPr>
+            </a:defPPr>
+          </a:lstStyle>
+          <a:p xmlns:a="http://schemas.openxmlformats.org/drawingml/2006/main">
+            <a:pPr>
+              <a:defRPr sz="1200" b="0">
+                <a:solidFill>
+                  <a:srgbClr val="5C686B"/>
+                </a:solidFill>
+                <a:latin typeface="NanumGothic"/>
+                <a:ea typeface="NanumGothic"/>
+                <a:cs typeface="NanumGothic"/>
+              </a:defRPr>
+            </a:pPr>
+            <a:r>
+              <a:rPr sz="1200" b="0">
+                <a:solidFill>
+                  <a:srgbClr val="5C686B"/>
+                </a:solidFill>
+                <a:latin typeface="NanumGothic"/>
+                <a:ea typeface="NanumGothic"/>
+                <a:cs typeface="NanumGothic"/>
+              </a:rPr>
+              <a:t>공공기관은 협업 대상 · 실제 도입·매출·현장 효과는 미검증</a:t>
             </a:r>
           </a:p>
         </p:txBody>
@@ -17276,7 +16914,7 @@
           <p:cNvPr id="5" name="">
             <a:extLst xmlns:a="http://schemas.openxmlformats.org/drawingml/2006/main">
               <a:ext uri="{FF2B5EF4-FFF2-40B4-BE49-F238E27FC236}">
-                <a16:creationId xmlns:a16="http://schemas.microsoft.com/office/drawing/2014/main" id="{FFB86178-C3E6-44EA-A668-88A2259EC815}"/>
+                <a16:creationId xmlns:a16="http://schemas.microsoft.com/office/drawing/2014/main" id="{9B8C6596-12D7-4DE0-AA97-B2BF9328818F}"/>
               </a:ext>
             </a:extLst>
           </p:cNvPr>
@@ -17286,7 +16924,7 @@
           <p:nvPr/>
         </p:nvPicPr>
         <p:blipFill>
-          <a:blip xmlns:r="http://schemas.openxmlformats.org/officeDocument/2006/relationships" xmlns:a="http://schemas.openxmlformats.org/drawingml/2006/main" r:embed="R236eb68808424b9c"/>
+          <a:blip xmlns:r="http://schemas.openxmlformats.org/officeDocument/2006/relationships" xmlns:a="http://schemas.openxmlformats.org/drawingml/2006/main" r:embed="Rbacbdd5a92cd4b8d"/>
           <a:stretch xmlns:a="http://schemas.openxmlformats.org/drawingml/2006/main"/>
         </p:blipFill>
         <p:spPr>
@@ -17726,7 +17364,7 @@
           <p:cNvPr id="5" name="">
             <a:extLst xmlns:a="http://schemas.openxmlformats.org/drawingml/2006/main">
               <a:ext uri="{FF2B5EF4-FFF2-40B4-BE49-F238E27FC236}">
-                <a16:creationId xmlns:a16="http://schemas.microsoft.com/office/drawing/2014/main" id="{715BED2B-00CC-4A1A-BB66-DD24828C8C92}"/>
+                <a16:creationId xmlns:a16="http://schemas.microsoft.com/office/drawing/2014/main" id="{260E9946-8D34-4EE2-B121-47809F741C02}"/>
               </a:ext>
             </a:extLst>
           </p:cNvPr>
@@ -17736,7 +17374,7 @@
           <p:nvPr/>
         </p:nvPicPr>
         <p:blipFill>
-          <a:blip xmlns:r="http://schemas.openxmlformats.org/officeDocument/2006/relationships" xmlns:a="http://schemas.openxmlformats.org/drawingml/2006/main" r:embed="Rb540410b33d74816"/>
+          <a:blip xmlns:r="http://schemas.openxmlformats.org/officeDocument/2006/relationships" xmlns:a="http://schemas.openxmlformats.org/drawingml/2006/main" r:embed="R4066c6bee03f4299"/>
           <a:stretch xmlns:a="http://schemas.openxmlformats.org/drawingml/2006/main"/>
         </p:blipFill>
         <p:spPr>
@@ -18245,7 +17883,7 @@
           <p:cNvPr id="5" name="">
             <a:extLst xmlns:a="http://schemas.openxmlformats.org/drawingml/2006/main">
               <a:ext uri="{FF2B5EF4-FFF2-40B4-BE49-F238E27FC236}">
-                <a16:creationId xmlns:a16="http://schemas.microsoft.com/office/drawing/2014/main" id="{BFD51457-DAD9-484D-AFB7-DC972DC7DEC2}"/>
+                <a16:creationId xmlns:a16="http://schemas.microsoft.com/office/drawing/2014/main" id="{81708492-4B20-4BE4-8A94-0D3C56026B19}"/>
               </a:ext>
             </a:extLst>
           </p:cNvPr>
@@ -18255,7 +17893,7 @@
           <p:nvPr/>
         </p:nvPicPr>
         <p:blipFill>
-          <a:blip xmlns:r="http://schemas.openxmlformats.org/officeDocument/2006/relationships" xmlns:a="http://schemas.openxmlformats.org/drawingml/2006/main" r:embed="Readcc1cb29e64fa6"/>
+          <a:blip xmlns:r="http://schemas.openxmlformats.org/officeDocument/2006/relationships" xmlns:a="http://schemas.openxmlformats.org/drawingml/2006/main" r:embed="R456829edfe264357"/>
           <a:stretch xmlns:a="http://schemas.openxmlformats.org/drawingml/2006/main"/>
         </p:blipFill>
         <p:spPr>
@@ -18578,7 +18216,7 @@
           <p:cNvPr id="5" name="">
             <a:extLst xmlns:a="http://schemas.openxmlformats.org/drawingml/2006/main">
               <a:ext uri="{FF2B5EF4-FFF2-40B4-BE49-F238E27FC236}">
-                <a16:creationId xmlns:a16="http://schemas.microsoft.com/office/drawing/2014/main" id="{CD60043E-1D3E-4D7C-9974-6855704EA2DE}"/>
+                <a16:creationId xmlns:a16="http://schemas.microsoft.com/office/drawing/2014/main" id="{7729DAE7-B699-43D0-A5DD-55F1600B6B3D}"/>
               </a:ext>
             </a:extLst>
           </p:cNvPr>
@@ -18588,7 +18226,7 @@
           <p:nvPr/>
         </p:nvPicPr>
         <p:blipFill>
-          <a:blip xmlns:r="http://schemas.openxmlformats.org/officeDocument/2006/relationships" xmlns:a="http://schemas.openxmlformats.org/drawingml/2006/main" r:embed="Rf38db9d6e07f4a7b"/>
+          <a:blip xmlns:r="http://schemas.openxmlformats.org/officeDocument/2006/relationships" xmlns:a="http://schemas.openxmlformats.org/drawingml/2006/main" r:embed="Rba929c2789f147bf"/>
           <a:stretch xmlns:a="http://schemas.openxmlformats.org/drawingml/2006/main"/>
         </p:blipFill>
         <p:spPr>
@@ -19256,7 +18894,7 @@
           <p:cNvPr id="5" name="">
             <a:extLst xmlns:a="http://schemas.openxmlformats.org/drawingml/2006/main">
               <a:ext uri="{FF2B5EF4-FFF2-40B4-BE49-F238E27FC236}">
-                <a16:creationId xmlns:a16="http://schemas.microsoft.com/office/drawing/2014/main" id="{637537FD-C7C9-45DC-B658-6F1B611A8EAD}"/>
+                <a16:creationId xmlns:a16="http://schemas.microsoft.com/office/drawing/2014/main" id="{735B8FAC-DF90-4A9B-B50D-C666BC625998}"/>
               </a:ext>
             </a:extLst>
           </p:cNvPr>
@@ -19266,7 +18904,7 @@
           <p:nvPr/>
         </p:nvPicPr>
         <p:blipFill>
-          <a:blip xmlns:r="http://schemas.openxmlformats.org/officeDocument/2006/relationships" xmlns:a="http://schemas.openxmlformats.org/drawingml/2006/main" r:embed="R4a25f8d6fb7a41c6"/>
+          <a:blip xmlns:r="http://schemas.openxmlformats.org/officeDocument/2006/relationships" xmlns:a="http://schemas.openxmlformats.org/drawingml/2006/main" r:embed="R566ba7e0f6114a25"/>
           <a:stretch xmlns:a="http://schemas.openxmlformats.org/drawingml/2006/main"/>
         </p:blipFill>
         <p:spPr>
@@ -19775,7 +19413,7 @@
           <p:cNvPr id="5" name="">
             <a:extLst xmlns:a="http://schemas.openxmlformats.org/drawingml/2006/main">
               <a:ext uri="{FF2B5EF4-FFF2-40B4-BE49-F238E27FC236}">
-                <a16:creationId xmlns:a16="http://schemas.microsoft.com/office/drawing/2014/main" id="{3AFA88BC-48E8-4C5B-8BBC-FC18272716DB}"/>
+                <a16:creationId xmlns:a16="http://schemas.microsoft.com/office/drawing/2014/main" id="{6B301E3B-E407-49D6-9E5F-D99AAAEC7DB7}"/>
               </a:ext>
             </a:extLst>
           </p:cNvPr>
@@ -19785,7 +19423,7 @@
           <p:nvPr/>
         </p:nvPicPr>
         <p:blipFill>
-          <a:blip xmlns:r="http://schemas.openxmlformats.org/officeDocument/2006/relationships" xmlns:a="http://schemas.openxmlformats.org/drawingml/2006/main" r:embed="R8d3dc8ba17584c8d"/>
+          <a:blip xmlns:r="http://schemas.openxmlformats.org/officeDocument/2006/relationships" xmlns:a="http://schemas.openxmlformats.org/drawingml/2006/main" r:embed="R17c5e1760ccd426d"/>
           <a:stretch xmlns:a="http://schemas.openxmlformats.org/drawingml/2006/main"/>
         </p:blipFill>
         <p:spPr>
@@ -20108,7 +19746,7 @@
           <p:cNvPr id="5" name="">
             <a:extLst xmlns:a="http://schemas.openxmlformats.org/drawingml/2006/main">
               <a:ext uri="{FF2B5EF4-FFF2-40B4-BE49-F238E27FC236}">
-                <a16:creationId xmlns:a16="http://schemas.microsoft.com/office/drawing/2014/main" id="{DB7A0FB5-45EF-42A0-BABE-ABD0BE5A3815}"/>
+                <a16:creationId xmlns:a16="http://schemas.microsoft.com/office/drawing/2014/main" id="{563378E8-B749-46AD-96D6-00B88055C0C1}"/>
               </a:ext>
             </a:extLst>
           </p:cNvPr>
@@ -20118,7 +19756,7 @@
           <p:nvPr/>
         </p:nvPicPr>
         <p:blipFill>
-          <a:blip xmlns:r="http://schemas.openxmlformats.org/officeDocument/2006/relationships" xmlns:a="http://schemas.openxmlformats.org/drawingml/2006/main" r:embed="Rcc24934c189a42c9"/>
+          <a:blip xmlns:r="http://schemas.openxmlformats.org/officeDocument/2006/relationships" xmlns:a="http://schemas.openxmlformats.org/drawingml/2006/main" r:embed="R2723f7fbbe554954"/>
           <a:stretch xmlns:a="http://schemas.openxmlformats.org/drawingml/2006/main"/>
         </p:blipFill>
         <p:spPr>
@@ -20441,7 +20079,7 @@
           <p:cNvPr id="5" name="">
             <a:extLst xmlns:a="http://schemas.openxmlformats.org/drawingml/2006/main">
               <a:ext uri="{FF2B5EF4-FFF2-40B4-BE49-F238E27FC236}">
-                <a16:creationId xmlns:a16="http://schemas.microsoft.com/office/drawing/2014/main" id="{29325C16-36F2-4922-9EA8-CAB1AA980FC5}"/>
+                <a16:creationId xmlns:a16="http://schemas.microsoft.com/office/drawing/2014/main" id="{28351332-98DB-458D-A0B4-1A47CE888856}"/>
               </a:ext>
             </a:extLst>
           </p:cNvPr>
@@ -20451,7 +20089,7 @@
           <p:nvPr/>
         </p:nvPicPr>
         <p:blipFill>
-          <a:blip xmlns:r="http://schemas.openxmlformats.org/officeDocument/2006/relationships" xmlns:a="http://schemas.openxmlformats.org/drawingml/2006/main" r:embed="Redc88114df964a39"/>
+          <a:blip xmlns:r="http://schemas.openxmlformats.org/officeDocument/2006/relationships" xmlns:a="http://schemas.openxmlformats.org/drawingml/2006/main" r:embed="R068416c87c3441af"/>
           <a:stretch xmlns:a="http://schemas.openxmlformats.org/drawingml/2006/main"/>
         </p:blipFill>
         <p:spPr>
@@ -20960,7 +20598,7 @@
           <p:cNvPr id="5" name="">
             <a:extLst xmlns:a="http://schemas.openxmlformats.org/drawingml/2006/main">
               <a:ext uri="{FF2B5EF4-FFF2-40B4-BE49-F238E27FC236}">
-                <a16:creationId xmlns:a16="http://schemas.microsoft.com/office/drawing/2014/main" id="{F8E9A6CD-AB55-44D6-BB80-BD8826B1B6EA}"/>
+                <a16:creationId xmlns:a16="http://schemas.microsoft.com/office/drawing/2014/main" id="{54E5550C-9559-432A-9EE3-D8AA11E37BF1}"/>
               </a:ext>
             </a:extLst>
           </p:cNvPr>
@@ -20970,7 +20608,7 @@
           <p:nvPr/>
         </p:nvPicPr>
         <p:blipFill>
-          <a:blip xmlns:r="http://schemas.openxmlformats.org/officeDocument/2006/relationships" xmlns:a="http://schemas.openxmlformats.org/drawingml/2006/main" r:embed="R49faf9a8f1434478"/>
+          <a:blip xmlns:r="http://schemas.openxmlformats.org/officeDocument/2006/relationships" xmlns:a="http://schemas.openxmlformats.org/drawingml/2006/main" r:embed="R96b5c51953e1442a"/>
           <a:stretch xmlns:a="http://schemas.openxmlformats.org/drawingml/2006/main"/>
         </p:blipFill>
         <p:spPr>
@@ -21017,7 +20655,7 @@
           <p:cNvPr id="6" name="">
             <a:extLst xmlns:a="http://schemas.openxmlformats.org/drawingml/2006/main">
               <a:ext uri="{FF2B5EF4-FFF2-40B4-BE49-F238E27FC236}">
-                <a16:creationId xmlns:a16="http://schemas.microsoft.com/office/drawing/2014/main" id="{EDD8C668-2433-4EA2-928D-8FCD0D4B4B6F}"/>
+                <a16:creationId xmlns:a16="http://schemas.microsoft.com/office/drawing/2014/main" id="{B3655374-FA0C-456F-86AC-906CE59F15CC}"/>
               </a:ext>
             </a:extLst>
           </p:cNvPr>
@@ -21085,7 +20723,7 @@
           <p:cNvPr id="2" name="">
             <a:extLst xmlns:a="http://schemas.openxmlformats.org/drawingml/2006/main">
               <a:ext uri="{FF2B5EF4-FFF2-40B4-BE49-F238E27FC236}">
-                <a16:creationId xmlns:a16="http://schemas.microsoft.com/office/drawing/2014/main" id="{DC98DD8A-1A09-44AE-87C4-C56090825A49}"/>
+                <a16:creationId xmlns:a16="http://schemas.microsoft.com/office/drawing/2014/main" id="{FE0C3198-9ECC-4DD8-8414-D69C23AE29DF}"/>
               </a:ext>
             </a:extLst>
           </p:cNvPr>
@@ -21143,7 +20781,7 @@
                 <a:ea typeface="NanumGothic"/>
                 <a:cs typeface="NanumGothic"/>
               </a:rPr>
-              <a:t>서울 구별 관제에 전국 실측 추가</a:t>
+              <a:t>서울 관제·전국 실측·합성 시뮬레이션</a:t>
             </a:r>
           </a:p>
         </p:txBody>
@@ -21153,7 +20791,7 @@
           <p:cNvPr id="3" name="">
             <a:extLst xmlns:a="http://schemas.openxmlformats.org/drawingml/2006/main">
               <a:ext uri="{FF2B5EF4-FFF2-40B4-BE49-F238E27FC236}">
-                <a16:creationId xmlns:a16="http://schemas.microsoft.com/office/drawing/2014/main" id="{ED57D179-9BF5-4854-A64F-CDFB05439541}"/>
+                <a16:creationId xmlns:a16="http://schemas.microsoft.com/office/drawing/2014/main" id="{3423D953-EBED-4572-8365-DC4849DE04E0}"/>
               </a:ext>
             </a:extLst>
           </p:cNvPr>
@@ -21221,7 +20859,7 @@
           <p:cNvPr id="4" name="">
             <a:extLst xmlns:a="http://schemas.openxmlformats.org/drawingml/2006/main">
               <a:ext uri="{FF2B5EF4-FFF2-40B4-BE49-F238E27FC236}">
-                <a16:creationId xmlns:a16="http://schemas.microsoft.com/office/drawing/2014/main" id="{9007EB1A-39B4-4C3E-AE4C-5C6E45209003}"/>
+                <a16:creationId xmlns:a16="http://schemas.microsoft.com/office/drawing/2014/main" id="{98D5A021-19EE-4227-9EB1-1A391EC1754B}"/>
               </a:ext>
             </a:extLst>
           </p:cNvPr>
@@ -21231,7 +20869,7 @@
           <p:nvPr/>
         </p:nvPicPr>
         <p:blipFill>
-          <a:blip xmlns:r="http://schemas.openxmlformats.org/officeDocument/2006/relationships" xmlns:a="http://schemas.openxmlformats.org/drawingml/2006/main" r:embed="Rc787b937be844b7a"/>
+          <a:blip xmlns:r="http://schemas.openxmlformats.org/officeDocument/2006/relationships" xmlns:a="http://schemas.openxmlformats.org/drawingml/2006/main" r:embed="Re379c3d1bc284fed"/>
           <a:stretch xmlns:a="http://schemas.openxmlformats.org/drawingml/2006/main"/>
         </p:blipFill>
         <p:spPr>
@@ -21249,7 +20887,7 @@
           <p:cNvPr id="5" name="">
             <a:extLst xmlns:a="http://schemas.openxmlformats.org/drawingml/2006/main">
               <a:ext uri="{FF2B5EF4-FFF2-40B4-BE49-F238E27FC236}">
-                <a16:creationId xmlns:a16="http://schemas.microsoft.com/office/drawing/2014/main" id="{766F29B9-995B-493B-BA3D-4A59555D696F}"/>
+                <a16:creationId xmlns:a16="http://schemas.microsoft.com/office/drawing/2014/main" id="{E912B4DF-AE37-4336-AE33-B1F8365FF756}"/>
               </a:ext>
             </a:extLst>
           </p:cNvPr>
@@ -21307,7 +20945,7 @@
                 <a:ea typeface="NanumGothic"/>
                 <a:cs typeface="NanumGothic"/>
               </a:rPr>
-              <a:t>서울 25개 구 기본 · 전국 3곳 추가 조회 · 수위 Three.js 비교</a:t>
+              <a:t>서울25 기본 · 전국 실측3 · 전국17시도 합성 모드</a:t>
             </a:r>
           </a:p>
         </p:txBody>
@@ -21315,7 +20953,7 @@
     </p:spTree>
     <p:extLst>
       <p:ext uri="{BB962C8B-B14F-4D97-AF65-F5344CB8AC3E}">
-        <p14:creationId xmlns:p14="http://schemas.microsoft.com/office/powerpoint/2010/main" val="305824692"/>
+        <p14:creationId xmlns:p14="http://schemas.microsoft.com/office/powerpoint/2010/main" val="1235465938"/>
       </p:ext>
     </p:extLst>
   </p:cSld>
@@ -21603,7 +21241,7 @@
           <p:cNvPr id="5" name="">
             <a:extLst xmlns:a="http://schemas.openxmlformats.org/drawingml/2006/main">
               <a:ext uri="{FF2B5EF4-FFF2-40B4-BE49-F238E27FC236}">
-                <a16:creationId xmlns:a16="http://schemas.microsoft.com/office/drawing/2014/main" id="{9751068C-DDB2-4213-A044-F415C2648B51}"/>
+                <a16:creationId xmlns:a16="http://schemas.microsoft.com/office/drawing/2014/main" id="{5DC87D2B-653C-4622-84D4-2165AE4FD57F}"/>
               </a:ext>
             </a:extLst>
           </p:cNvPr>
@@ -22031,7 +21669,7 @@
           <p:cNvPr id="6" name="">
             <a:extLst xmlns:a="http://schemas.openxmlformats.org/drawingml/2006/main">
               <a:ext uri="{FF2B5EF4-FFF2-40B4-BE49-F238E27FC236}">
-                <a16:creationId xmlns:a16="http://schemas.microsoft.com/office/drawing/2014/main" id="{0A76E357-6BE4-44D3-B00A-C29F8E22354C}"/>
+                <a16:creationId xmlns:a16="http://schemas.microsoft.com/office/drawing/2014/main" id="{83505055-8953-4C15-9C4A-4C8E3A428E85}"/>
               </a:ext>
             </a:extLst>
           </p:cNvPr>
@@ -22099,7 +21737,7 @@
           <p:cNvPr id="2" name="">
             <a:extLst xmlns:a="http://schemas.openxmlformats.org/drawingml/2006/main">
               <a:ext uri="{FF2B5EF4-FFF2-40B4-BE49-F238E27FC236}">
-                <a16:creationId xmlns:a16="http://schemas.microsoft.com/office/drawing/2014/main" id="{4503D777-ADFA-4CA8-9FF3-8B562E9F1003}"/>
+                <a16:creationId xmlns:a16="http://schemas.microsoft.com/office/drawing/2014/main" id="{819DAFB4-780A-48DD-8B71-AAB4D5356E7D}"/>
               </a:ext>
             </a:extLst>
           </p:cNvPr>
@@ -22167,7 +21805,7 @@
           <p:cNvPr id="3" name="">
             <a:extLst xmlns:a="http://schemas.openxmlformats.org/drawingml/2006/main">
               <a:ext uri="{FF2B5EF4-FFF2-40B4-BE49-F238E27FC236}">
-                <a16:creationId xmlns:a16="http://schemas.microsoft.com/office/drawing/2014/main" id="{DFA930A9-E3CD-40F2-8EC3-767DCE6A46EF}"/>
+                <a16:creationId xmlns:a16="http://schemas.microsoft.com/office/drawing/2014/main" id="{C7CB4ABC-C259-4B58-88C4-A0268AC0A340}"/>
               </a:ext>
             </a:extLst>
           </p:cNvPr>
@@ -22235,7 +21873,7 @@
           <p:cNvPr id="4" name="">
             <a:extLst xmlns:a="http://schemas.openxmlformats.org/drawingml/2006/main">
               <a:ext uri="{FF2B5EF4-FFF2-40B4-BE49-F238E27FC236}">
-                <a16:creationId xmlns:a16="http://schemas.microsoft.com/office/drawing/2014/main" id="{4EEF5C9A-ED31-4657-90F3-367380601A7A}"/>
+                <a16:creationId xmlns:a16="http://schemas.microsoft.com/office/drawing/2014/main" id="{242624E3-F680-4306-9125-3C4F3C81FDD5}"/>
               </a:ext>
             </a:extLst>
           </p:cNvPr>
@@ -22368,7 +22006,7 @@
                           <a:ea typeface="NanumGothic"/>
                           <a:cs typeface="NanumGothic"/>
                         </a:rPr>
-                        <a:t>25개 구 대표 관측소</a:t>
+                        <a:t>실측22,582행 ~9/30</a:t>
                       </a:r>
                     </a:p>
                   </a:txBody>
@@ -22392,7 +22030,7 @@
                           <a:ea typeface="NanumGothic"/>
                           <a:cs typeface="NanumGothic"/>
                         </a:rPr>
-                        <a:t>현재 STALE · 저장 검증</a:t>
+                        <a:t>10/1 합성 · 모델23/25</a:t>
                       </a:r>
                     </a:p>
                   </a:txBody>
@@ -22492,7 +22130,7 @@
                           <a:ea typeface="NanumGothic"/>
                           <a:cs typeface="NanumGothic"/>
                         </a:rPr>
-                        <a:t>완료 일강수</a:t>
+                        <a:t>전국 합성 모드</a:t>
                       </a:r>
                     </a:p>
                   </a:txBody>
@@ -22516,7 +22154,7 @@
                           <a:ea typeface="NanumGothic"/>
                           <a:cs typeface="NanumGothic"/>
                         </a:rPr>
-                        <a:t>280일 · 201,206건</a:t>
+                        <a:t>17시도 · 29,597행 합성</a:t>
                       </a:r>
                     </a:p>
                   </a:txBody>
@@ -22540,7 +22178,7 @@
                           <a:ea typeface="NanumGothic"/>
                           <a:cs typeface="NanumGothic"/>
                         </a:rPr>
-                        <a:t>강수 지도·이력</a:t>
+                        <a:t>LSTM16 · 비교 기준1</a:t>
                       </a:r>
                     </a:p>
                   </a:txBody>
@@ -22634,7 +22272,7 @@
           <p:cNvPr id="5" name="">
             <a:extLst xmlns:a="http://schemas.openxmlformats.org/drawingml/2006/main">
               <a:ext uri="{FF2B5EF4-FFF2-40B4-BE49-F238E27FC236}">
-                <a16:creationId xmlns:a16="http://schemas.microsoft.com/office/drawing/2014/main" id="{9084D5C3-BFF3-41D1-8D96-4E413AEC814B}"/>
+                <a16:creationId xmlns:a16="http://schemas.microsoft.com/office/drawing/2014/main" id="{ACEABBE3-B22C-42F2-A312-B12762653CFE}"/>
               </a:ext>
             </a:extLst>
           </p:cNvPr>
@@ -22692,7 +22330,7 @@
                 <a:ea typeface="NanumGothic"/>
                 <a:cs typeface="NanumGothic"/>
               </a:rPr>
-              <a:t>구별 대표 관측소 수위이며 구 전체 평균을 뜻하지 않습니다</a:t>
+              <a:t>ASOS6년 원천 유효2,731 · 결측3,845일 · 결측0 채움 없음</a:t>
             </a:r>
           </a:p>
         </p:txBody>
@@ -22700,7 +22338,7 @@
     </p:spTree>
     <p:extLst>
       <p:ext uri="{BB962C8B-B14F-4D97-AF65-F5344CB8AC3E}">
-        <p14:creationId xmlns:p14="http://schemas.microsoft.com/office/powerpoint/2010/main" val="1295669580"/>
+        <p14:creationId xmlns:p14="http://schemas.microsoft.com/office/powerpoint/2010/main" val="1186945390"/>
       </p:ext>
     </p:extLst>
   </p:cSld>
@@ -22731,7 +22369,7 @@
           <p:cNvPr id="6" name="">
             <a:extLst xmlns:a="http://schemas.openxmlformats.org/drawingml/2006/main">
               <a:ext uri="{FF2B5EF4-FFF2-40B4-BE49-F238E27FC236}">
-                <a16:creationId xmlns:a16="http://schemas.microsoft.com/office/drawing/2014/main" id="{B2EEB59A-6655-4FFD-B9FD-0BF69B1835EA}"/>
+                <a16:creationId xmlns:a16="http://schemas.microsoft.com/office/drawing/2014/main" id="{CC6C1D98-F037-4FB2-B637-C53888E7B3B8}"/>
               </a:ext>
             </a:extLst>
           </p:cNvPr>
@@ -22799,7 +22437,7 @@
           <p:cNvPr id="2" name="">
             <a:extLst xmlns:a="http://schemas.openxmlformats.org/drawingml/2006/main">
               <a:ext uri="{FF2B5EF4-FFF2-40B4-BE49-F238E27FC236}">
-                <a16:creationId xmlns:a16="http://schemas.microsoft.com/office/drawing/2014/main" id="{C5076C89-BB1C-4B10-A85C-077DEB016E0E}"/>
+                <a16:creationId xmlns:a16="http://schemas.microsoft.com/office/drawing/2014/main" id="{7F5FE8BD-9F5B-450D-A316-BAAE520F6470}"/>
               </a:ext>
             </a:extLst>
           </p:cNvPr>
@@ -22867,7 +22505,7 @@
           <p:cNvPr id="3" name="">
             <a:extLst xmlns:a="http://schemas.openxmlformats.org/drawingml/2006/main">
               <a:ext uri="{FF2B5EF4-FFF2-40B4-BE49-F238E27FC236}">
-                <a16:creationId xmlns:a16="http://schemas.microsoft.com/office/drawing/2014/main" id="{12F7584A-664A-410F-B70C-998D29306897}"/>
+                <a16:creationId xmlns:a16="http://schemas.microsoft.com/office/drawing/2014/main" id="{9FCE15BF-21F3-4D8B-8E01-3FB9EE342E5A}"/>
               </a:ext>
             </a:extLst>
           </p:cNvPr>
@@ -22935,7 +22573,7 @@
           <p:cNvPr id="4" name="">
             <a:extLst xmlns:a="http://schemas.openxmlformats.org/drawingml/2006/main">
               <a:ext uri="{FF2B5EF4-FFF2-40B4-BE49-F238E27FC236}">
-                <a16:creationId xmlns:a16="http://schemas.microsoft.com/office/drawing/2014/main" id="{1C18F122-E526-4BE1-A313-D8A4A7715AC9}"/>
+                <a16:creationId xmlns:a16="http://schemas.microsoft.com/office/drawing/2014/main" id="{6818B0C3-499A-441B-87A7-FA15AFCA5BB1}"/>
               </a:ext>
             </a:extLst>
           </p:cNvPr>
@@ -23260,7 +22898,7 @@
           <p:cNvPr id="5" name="">
             <a:extLst xmlns:a="http://schemas.openxmlformats.org/drawingml/2006/main">
               <a:ext uri="{FF2B5EF4-FFF2-40B4-BE49-F238E27FC236}">
-                <a16:creationId xmlns:a16="http://schemas.microsoft.com/office/drawing/2014/main" id="{EB4487B6-7522-4D8B-97ED-01B63C1F0A77}"/>
+                <a16:creationId xmlns:a16="http://schemas.microsoft.com/office/drawing/2014/main" id="{BBA074B6-77AA-4BF3-A1E6-DDF11FA9FC5A}"/>
               </a:ext>
             </a:extLst>
           </p:cNvPr>
@@ -23326,7 +22964,7 @@
     </p:spTree>
     <p:extLst>
       <p:ext uri="{BB962C8B-B14F-4D97-AF65-F5344CB8AC3E}">
-        <p14:creationId xmlns:p14="http://schemas.microsoft.com/office/powerpoint/2010/main" val="122509488"/>
+        <p14:creationId xmlns:p14="http://schemas.microsoft.com/office/powerpoint/2010/main" val="1314777217"/>
       </p:ext>
     </p:extLst>
   </p:cSld>
@@ -23357,7 +22995,7 @@
           <p:cNvPr id="8" name="">
             <a:extLst xmlns:a="http://schemas.openxmlformats.org/drawingml/2006/main">
               <a:ext uri="{FF2B5EF4-FFF2-40B4-BE49-F238E27FC236}">
-                <a16:creationId xmlns:a16="http://schemas.microsoft.com/office/drawing/2014/main" id="{13E95D73-8155-4B9D-A3E8-6D075A1AF792}"/>
+                <a16:creationId xmlns:a16="http://schemas.microsoft.com/office/drawing/2014/main" id="{134F245B-0789-48D1-81B0-D261DD04C991}"/>
               </a:ext>
             </a:extLst>
           </p:cNvPr>
@@ -23425,7 +23063,7 @@
           <p:cNvPr id="2" name="">
             <a:extLst xmlns:a="http://schemas.openxmlformats.org/drawingml/2006/main">
               <a:ext uri="{FF2B5EF4-FFF2-40B4-BE49-F238E27FC236}">
-                <a16:creationId xmlns:a16="http://schemas.microsoft.com/office/drawing/2014/main" id="{725D8764-970C-4BFE-A2EA-F627610E211A}"/>
+                <a16:creationId xmlns:a16="http://schemas.microsoft.com/office/drawing/2014/main" id="{E06200ED-034F-4744-8B2E-64D1BD97D686}"/>
               </a:ext>
             </a:extLst>
           </p:cNvPr>
@@ -23493,7 +23131,7 @@
           <p:cNvPr id="3" name="">
             <a:extLst xmlns:a="http://schemas.openxmlformats.org/drawingml/2006/main">
               <a:ext uri="{FF2B5EF4-FFF2-40B4-BE49-F238E27FC236}">
-                <a16:creationId xmlns:a16="http://schemas.microsoft.com/office/drawing/2014/main" id="{4F961978-B1C4-4605-BC4D-004DCD8F169B}"/>
+                <a16:creationId xmlns:a16="http://schemas.microsoft.com/office/drawing/2014/main" id="{D598A5C0-50DA-45BF-933F-B9B1BCA1EC17}"/>
               </a:ext>
             </a:extLst>
           </p:cNvPr>
@@ -23561,7 +23199,7 @@
           <p:cNvPr id="4" name="">
             <a:extLst xmlns:a="http://schemas.openxmlformats.org/drawingml/2006/main">
               <a:ext uri="{FF2B5EF4-FFF2-40B4-BE49-F238E27FC236}">
-                <a16:creationId xmlns:a16="http://schemas.microsoft.com/office/drawing/2014/main" id="{3F092E0F-F968-40BA-B2D9-9AD71A722325}"/>
+                <a16:creationId xmlns:a16="http://schemas.microsoft.com/office/drawing/2014/main" id="{5CFD4727-35C6-44B1-8DB7-C076768D02D4}"/>
               </a:ext>
             </a:extLst>
           </p:cNvPr>
@@ -23629,7 +23267,7 @@
           <p:cNvPr id="5" name="">
             <a:extLst xmlns:a="http://schemas.openxmlformats.org/drawingml/2006/main">
               <a:ext uri="{FF2B5EF4-FFF2-40B4-BE49-F238E27FC236}">
-                <a16:creationId xmlns:a16="http://schemas.microsoft.com/office/drawing/2014/main" id="{0F19E21F-C16D-4428-A9F2-F4DE7BC638C6}"/>
+                <a16:creationId xmlns:a16="http://schemas.microsoft.com/office/drawing/2014/main" id="{3772CB50-27D0-4052-B85F-519E7327B06A}"/>
               </a:ext>
             </a:extLst>
           </p:cNvPr>
@@ -23697,7 +23335,7 @@
           <p:cNvPr id="6" name="">
             <a:extLst xmlns:a="http://schemas.openxmlformats.org/drawingml/2006/main">
               <a:ext uri="{FF2B5EF4-FFF2-40B4-BE49-F238E27FC236}">
-                <a16:creationId xmlns:a16="http://schemas.microsoft.com/office/drawing/2014/main" id="{CD7FB51D-AE14-4759-BBFD-359827122D05}"/>
+                <a16:creationId xmlns:a16="http://schemas.microsoft.com/office/drawing/2014/main" id="{53AD31BE-C39C-4994-B2D6-1FE87DBE88F5}"/>
               </a:ext>
             </a:extLst>
           </p:cNvPr>
@@ -23755,7 +23393,7 @@
                 <a:ea typeface="NanumGothic"/>
                 <a:cs typeface="NanumGothic"/>
               </a:rPr>
-              <a:t>학습 1~5월     검증 6월     공통 평가 7~10월</a:t>
+              <a:t>실측: 학습1~5월 · 검증6월 · 평가7~10월</a:t>
             </a:r>
           </a:p>
         </p:txBody>
@@ -23765,7 +23403,7 @@
           <p:cNvPr id="7" name="">
             <a:extLst xmlns:a="http://schemas.openxmlformats.org/drawingml/2006/main">
               <a:ext uri="{FF2B5EF4-FFF2-40B4-BE49-F238E27FC236}">
-                <a16:creationId xmlns:a16="http://schemas.microsoft.com/office/drawing/2014/main" id="{AE1266DB-5F1D-445B-82D7-5A528D76B8CA}"/>
+                <a16:creationId xmlns:a16="http://schemas.microsoft.com/office/drawing/2014/main" id="{D7DB24DF-506F-45C3-920C-27571B7CF275}"/>
               </a:ext>
             </a:extLst>
           </p:cNvPr>
@@ -23854,7 +23492,7 @@
     </p:spTree>
     <p:extLst>
       <p:ext uri="{BB962C8B-B14F-4D97-AF65-F5344CB8AC3E}">
-        <p14:creationId xmlns:p14="http://schemas.microsoft.com/office/powerpoint/2010/main" val="248257673"/>
+        <p14:creationId xmlns:p14="http://schemas.microsoft.com/office/powerpoint/2010/main" val="1146652568"/>
       </p:ext>
     </p:extLst>
   </p:cSld>
@@ -23885,7 +23523,7 @@
           <p:cNvPr id="7" name="">
             <a:extLst xmlns:a="http://schemas.openxmlformats.org/drawingml/2006/main">
               <a:ext uri="{FF2B5EF4-FFF2-40B4-BE49-F238E27FC236}">
-                <a16:creationId xmlns:a16="http://schemas.microsoft.com/office/drawing/2014/main" id="{A3437349-9673-4B14-853A-045BC8ED5749}"/>
+                <a16:creationId xmlns:a16="http://schemas.microsoft.com/office/drawing/2014/main" id="{EED02E74-ED17-48E4-94A5-B4D868F0B5C2}"/>
               </a:ext>
             </a:extLst>
           </p:cNvPr>
@@ -23953,7 +23591,7 @@
           <p:cNvPr id="2" name="">
             <a:extLst xmlns:a="http://schemas.openxmlformats.org/drawingml/2006/main">
               <a:ext uri="{FF2B5EF4-FFF2-40B4-BE49-F238E27FC236}">
-                <a16:creationId xmlns:a16="http://schemas.microsoft.com/office/drawing/2014/main" id="{14973ECC-84B7-4B79-9E9F-73B9356A926C}"/>
+                <a16:creationId xmlns:a16="http://schemas.microsoft.com/office/drawing/2014/main" id="{63BB30EF-514B-4F59-9CF2-7BB047AC0698}"/>
               </a:ext>
             </a:extLst>
           </p:cNvPr>
@@ -24021,7 +23659,7 @@
           <p:cNvPr id="3" name="">
             <a:extLst xmlns:a="http://schemas.openxmlformats.org/drawingml/2006/main">
               <a:ext uri="{FF2B5EF4-FFF2-40B4-BE49-F238E27FC236}">
-                <a16:creationId xmlns:a16="http://schemas.microsoft.com/office/drawing/2014/main" id="{7E14A2F7-4F9B-446F-B041-916F4331FA7F}"/>
+                <a16:creationId xmlns:a16="http://schemas.microsoft.com/office/drawing/2014/main" id="{6245B1CC-A79A-4550-B503-73DCDC9630B5}"/>
               </a:ext>
             </a:extLst>
           </p:cNvPr>
@@ -24089,7 +23727,7 @@
           <p:cNvPr id="4" name="">
             <a:extLst xmlns:a="http://schemas.openxmlformats.org/drawingml/2006/main">
               <a:ext uri="{FF2B5EF4-FFF2-40B4-BE49-F238E27FC236}">
-                <a16:creationId xmlns:a16="http://schemas.microsoft.com/office/drawing/2014/main" id="{6E977BC7-B68C-4CD5-89AB-C04A877C8FDE}"/>
+                <a16:creationId xmlns:a16="http://schemas.microsoft.com/office/drawing/2014/main" id="{86FBE324-07B5-480C-83E7-62835724A414}"/>
               </a:ext>
             </a:extLst>
           </p:cNvPr>
@@ -24608,7 +24246,7 @@
           <p:cNvPr id="5" name="">
             <a:extLst xmlns:a="http://schemas.openxmlformats.org/drawingml/2006/main">
               <a:ext uri="{FF2B5EF4-FFF2-40B4-BE49-F238E27FC236}">
-                <a16:creationId xmlns:a16="http://schemas.microsoft.com/office/drawing/2014/main" id="{D911DF3B-62CC-4711-AA1D-2CB9791DFEF4}"/>
+                <a16:creationId xmlns:a16="http://schemas.microsoft.com/office/drawing/2014/main" id="{07C646F6-D187-468D-872E-8C25238FE9CD}"/>
               </a:ext>
             </a:extLst>
           </p:cNvPr>
@@ -24666,7 +24304,7 @@
                 <a:ea typeface="NanumGothic"/>
                 <a:cs typeface="NanumGothic"/>
               </a:rPr>
-              <a:t>RMSE 단위 m · 작을수록 좋음 · 감소율 음수는 악화</a:t>
+              <a:t>실측 RMSE(m) · 음수 감소율은 악화 · 제주M1도 persistence보다0.71% 악화</a:t>
             </a:r>
           </a:p>
         </p:txBody>
@@ -24676,7 +24314,7 @@
           <p:cNvPr id="6" name="">
             <a:extLst xmlns:a="http://schemas.openxmlformats.org/drawingml/2006/main">
               <a:ext uri="{FF2B5EF4-FFF2-40B4-BE49-F238E27FC236}">
-                <a16:creationId xmlns:a16="http://schemas.microsoft.com/office/drawing/2014/main" id="{80F671E0-E925-4F5C-BE52-D893BE839DD7}"/>
+                <a16:creationId xmlns:a16="http://schemas.microsoft.com/office/drawing/2014/main" id="{74C333B2-DD20-4824-9D9B-0FAD7247CDC8}"/>
               </a:ext>
             </a:extLst>
           </p:cNvPr>
@@ -24734,7 +24372,7 @@
                 <a:ea typeface="NanumGothic"/>
                 <a:cs typeface="NanumGothic"/>
               </a:rPr>
-              <a:t>제주 M1도 전체 persistence보다 0.71% 악화</a:t>
+              <a:t>합성17곳 × 640일: 전체0.04083→0.04066 · 5% 개선0곳</a:t>
             </a:r>
           </a:p>
           <a:p xmlns:a="http://schemas.openxmlformats.org/drawingml/2006/main">
@@ -24757,7 +24395,7 @@
                 <a:ea typeface="NanumGothic"/>
                 <a:cs typeface="NanumGothic"/>
               </a:rPr>
-              <a:t>단일 연도·3곳 평가이며 전국 성능 우수성을 뜻하지 않음</a:t>
+              <a:t>합성 장마0.09115→0.09119 · 강한 강수도 악화 / 운영 근거 아님</a:t>
             </a:r>
           </a:p>
         </p:txBody>
@@ -24765,7 +24403,7 @@
     </p:spTree>
     <p:extLst>
       <p:ext uri="{BB962C8B-B14F-4D97-AF65-F5344CB8AC3E}">
-        <p14:creationId xmlns:p14="http://schemas.microsoft.com/office/powerpoint/2010/main" val="699779136"/>
+        <p14:creationId xmlns:p14="http://schemas.microsoft.com/office/powerpoint/2010/main" val="642222680"/>
       </p:ext>
     </p:extLst>
   </p:cSld>
@@ -24796,7 +24434,7 @@
           <p:cNvPr id="9" name="">
             <a:extLst xmlns:a="http://schemas.openxmlformats.org/drawingml/2006/main">
               <a:ext uri="{FF2B5EF4-FFF2-40B4-BE49-F238E27FC236}">
-                <a16:creationId xmlns:a16="http://schemas.microsoft.com/office/drawing/2014/main" id="{5FF1C72D-F083-417F-9ABB-EFA0268D1BE8}"/>
+                <a16:creationId xmlns:a16="http://schemas.microsoft.com/office/drawing/2014/main" id="{0518EAB2-FF59-4ACD-8C13-80B300262337}"/>
               </a:ext>
             </a:extLst>
           </p:cNvPr>
@@ -24864,7 +24502,7 @@
           <p:cNvPr id="2" name="">
             <a:extLst xmlns:a="http://schemas.openxmlformats.org/drawingml/2006/main">
               <a:ext uri="{FF2B5EF4-FFF2-40B4-BE49-F238E27FC236}">
-                <a16:creationId xmlns:a16="http://schemas.microsoft.com/office/drawing/2014/main" id="{072AAEBF-B3F4-46A1-9823-62C475EF1DE7}"/>
+                <a16:creationId xmlns:a16="http://schemas.microsoft.com/office/drawing/2014/main" id="{F664CF70-882C-41F2-AA97-ABBB4D48DDC8}"/>
               </a:ext>
             </a:extLst>
           </p:cNvPr>
@@ -24932,7 +24570,7 @@
           <p:cNvPr id="3" name="">
             <a:extLst xmlns:a="http://schemas.openxmlformats.org/drawingml/2006/main">
               <a:ext uri="{FF2B5EF4-FFF2-40B4-BE49-F238E27FC236}">
-                <a16:creationId xmlns:a16="http://schemas.microsoft.com/office/drawing/2014/main" id="{D941CE0D-B9AC-463D-8FF9-5BA3944075FB}"/>
+                <a16:creationId xmlns:a16="http://schemas.microsoft.com/office/drawing/2014/main" id="{33B47B9F-191F-44E1-9605-4F25E7D78977}"/>
               </a:ext>
             </a:extLst>
           </p:cNvPr>
@@ -25000,7 +24638,7 @@
           <p:cNvPr id="4" name="">
             <a:extLst xmlns:a="http://schemas.openxmlformats.org/drawingml/2006/main">
               <a:ext uri="{FF2B5EF4-FFF2-40B4-BE49-F238E27FC236}">
-                <a16:creationId xmlns:a16="http://schemas.microsoft.com/office/drawing/2014/main" id="{D3F346F2-58A2-4845-BDC3-3A7B4AD2BCCC}"/>
+                <a16:creationId xmlns:a16="http://schemas.microsoft.com/office/drawing/2014/main" id="{913DF7B1-0B95-4009-8D8B-20F17EB1E10A}"/>
               </a:ext>
             </a:extLst>
           </p:cNvPr>
@@ -25068,7 +24706,7 @@
           <p:cNvPr id="5" name="">
             <a:extLst xmlns:a="http://schemas.openxmlformats.org/drawingml/2006/main">
               <a:ext uri="{FF2B5EF4-FFF2-40B4-BE49-F238E27FC236}">
-                <a16:creationId xmlns:a16="http://schemas.microsoft.com/office/drawing/2014/main" id="{136D74FD-34B3-44CB-AB79-2E8E812BE8EE}"/>
+                <a16:creationId xmlns:a16="http://schemas.microsoft.com/office/drawing/2014/main" id="{7C8D8E31-6B1B-435F-B94F-9B32F38D72F5}"/>
               </a:ext>
             </a:extLst>
           </p:cNvPr>
@@ -25136,7 +24774,7 @@
           <p:cNvPr id="6" name="">
             <a:extLst xmlns:a="http://schemas.openxmlformats.org/drawingml/2006/main">
               <a:ext uri="{FF2B5EF4-FFF2-40B4-BE49-F238E27FC236}">
-                <a16:creationId xmlns:a16="http://schemas.microsoft.com/office/drawing/2014/main" id="{A4F7351A-2EE7-4F59-AD16-8727E5EA239E}"/>
+                <a16:creationId xmlns:a16="http://schemas.microsoft.com/office/drawing/2014/main" id="{471F75A2-5802-407B-8587-F1CE2AAA91E8}"/>
               </a:ext>
             </a:extLst>
           </p:cNvPr>
@@ -25204,7 +24842,7 @@
           <p:cNvPr id="7" name="">
             <a:extLst xmlns:a="http://schemas.openxmlformats.org/drawingml/2006/main">
               <a:ext uri="{FF2B5EF4-FFF2-40B4-BE49-F238E27FC236}">
-                <a16:creationId xmlns:a16="http://schemas.microsoft.com/office/drawing/2014/main" id="{FA6B9DE6-9C2A-4C93-A2B3-F56D7C226268}"/>
+                <a16:creationId xmlns:a16="http://schemas.microsoft.com/office/drawing/2014/main" id="{BA20D8AC-1994-4FCA-85C6-9AC37F4DD9EE}"/>
               </a:ext>
             </a:extLst>
           </p:cNvPr>
@@ -25262,7 +24900,7 @@
                 <a:ea typeface="NanumGothic"/>
                 <a:cs typeface="NanumGothic"/>
               </a:rPr>
-              <a:t>현재 운영 미승인   실험 기준 통과와 운영 승격은 별도</a:t>
+              <a:t>계절 근거 부족 즉시 만료 · 후속 정답 대기 상한 90일</a:t>
             </a:r>
           </a:p>
         </p:txBody>
@@ -25272,7 +24910,7 @@
           <p:cNvPr id="8" name="">
             <a:extLst xmlns:a="http://schemas.openxmlformats.org/drawingml/2006/main">
               <a:ext uri="{FF2B5EF4-FFF2-40B4-BE49-F238E27FC236}">
-                <a16:creationId xmlns:a16="http://schemas.microsoft.com/office/drawing/2014/main" id="{5564865C-6566-4A0C-8C0F-DE30658B3F30}"/>
+                <a16:creationId xmlns:a16="http://schemas.microsoft.com/office/drawing/2014/main" id="{91B67711-5331-4BD7-A74B-82A096A369F8}"/>
               </a:ext>
             </a:extLst>
           </p:cNvPr>
@@ -25338,7 +24976,7 @@
     </p:spTree>
     <p:extLst>
       <p:ext uri="{BB962C8B-B14F-4D97-AF65-F5344CB8AC3E}">
-        <p14:creationId xmlns:p14="http://schemas.microsoft.com/office/powerpoint/2010/main" val="340578662"/>
+        <p14:creationId xmlns:p14="http://schemas.microsoft.com/office/powerpoint/2010/main" val="2016087603"/>
       </p:ext>
     </p:extLst>
   </p:cSld>
@@ -25369,7 +25007,7 @@
           <p:cNvPr id="6" name="">
             <a:extLst xmlns:a="http://schemas.openxmlformats.org/drawingml/2006/main">
               <a:ext uri="{FF2B5EF4-FFF2-40B4-BE49-F238E27FC236}">
-                <a16:creationId xmlns:a16="http://schemas.microsoft.com/office/drawing/2014/main" id="{5F1EA7C4-6B9C-4585-9031-19AAC4233925}"/>
+                <a16:creationId xmlns:a16="http://schemas.microsoft.com/office/drawing/2014/main" id="{28C41912-FA3D-4691-9923-60C0B6353961}"/>
               </a:ext>
             </a:extLst>
           </p:cNvPr>
@@ -25437,7 +25075,7 @@
           <p:cNvPr id="2" name="">
             <a:extLst xmlns:a="http://schemas.openxmlformats.org/drawingml/2006/main">
               <a:ext uri="{FF2B5EF4-FFF2-40B4-BE49-F238E27FC236}">
-                <a16:creationId xmlns:a16="http://schemas.microsoft.com/office/drawing/2014/main" id="{2266B4C8-96D5-4338-A9D9-EF640B075C9F}"/>
+                <a16:creationId xmlns:a16="http://schemas.microsoft.com/office/drawing/2014/main" id="{54EF75A8-13F6-48DE-93C0-09C68C3D5AE9}"/>
               </a:ext>
             </a:extLst>
           </p:cNvPr>
@@ -25505,7 +25143,7 @@
           <p:cNvPr id="3" name="">
             <a:extLst xmlns:a="http://schemas.openxmlformats.org/drawingml/2006/main">
               <a:ext uri="{FF2B5EF4-FFF2-40B4-BE49-F238E27FC236}">
-                <a16:creationId xmlns:a16="http://schemas.microsoft.com/office/drawing/2014/main" id="{6356749F-98F1-4A5C-93AC-F0052C2DADC6}"/>
+                <a16:creationId xmlns:a16="http://schemas.microsoft.com/office/drawing/2014/main" id="{5C273611-FC70-4A11-B3DA-69FBE833E811}"/>
               </a:ext>
             </a:extLst>
           </p:cNvPr>
@@ -25573,7 +25211,7 @@
           <p:cNvPr id="4" name="">
             <a:extLst xmlns:a="http://schemas.openxmlformats.org/drawingml/2006/main">
               <a:ext uri="{FF2B5EF4-FFF2-40B4-BE49-F238E27FC236}">
-                <a16:creationId xmlns:a16="http://schemas.microsoft.com/office/drawing/2014/main" id="{34FFA272-6103-418F-9795-67D3CA65A792}"/>
+                <a16:creationId xmlns:a16="http://schemas.microsoft.com/office/drawing/2014/main" id="{D5FBFAE7-6E68-454C-B597-EC4BF607CBF6}"/>
               </a:ext>
             </a:extLst>
           </p:cNvPr>
@@ -25801,7 +25439,7 @@
           <p:cNvPr id="5" name="">
             <a:extLst xmlns:a="http://schemas.openxmlformats.org/drawingml/2006/main">
               <a:ext uri="{FF2B5EF4-FFF2-40B4-BE49-F238E27FC236}">
-                <a16:creationId xmlns:a16="http://schemas.microsoft.com/office/drawing/2014/main" id="{3246950F-E7C6-4CE0-851F-9220F23E88CD}"/>
+                <a16:creationId xmlns:a16="http://schemas.microsoft.com/office/drawing/2014/main" id="{474F2DE4-A71C-4F21-8170-2B1F1EF6B3BA}"/>
               </a:ext>
             </a:extLst>
           </p:cNvPr>
@@ -25859,7 +25497,7 @@
                 <a:ea typeface="NanumGothic"/>
                 <a:cs typeface="NanumGothic"/>
               </a:rPr>
-              <a:t>Docker 201 통과·1 skip / 프런트 23 통과·빌드 성공</a:t>
+              <a:t>컨테이너226 통과·1skip / 프런트30 통과 · 기동·재기동 확인</a:t>
             </a:r>
           </a:p>
         </p:txBody>
@@ -25867,7 +25505,7 @@
     </p:spTree>
     <p:extLst>
       <p:ext uri="{BB962C8B-B14F-4D97-AF65-F5344CB8AC3E}">
-        <p14:creationId xmlns:p14="http://schemas.microsoft.com/office/powerpoint/2010/main" val="1738339507"/>
+        <p14:creationId xmlns:p14="http://schemas.microsoft.com/office/powerpoint/2010/main" val="1485351181"/>
       </p:ext>
     </p:extLst>
   </p:cSld>
@@ -25898,7 +25536,7 @@
           <p:cNvPr id="9" name="">
             <a:extLst xmlns:a="http://schemas.openxmlformats.org/drawingml/2006/main">
               <a:ext uri="{FF2B5EF4-FFF2-40B4-BE49-F238E27FC236}">
-                <a16:creationId xmlns:a16="http://schemas.microsoft.com/office/drawing/2014/main" id="{1382CB10-3D18-47E5-A054-B8BB1C3F287E}"/>
+                <a16:creationId xmlns:a16="http://schemas.microsoft.com/office/drawing/2014/main" id="{81D0CCAC-65AA-400E-B592-21C411E82E5F}"/>
               </a:ext>
             </a:extLst>
           </p:cNvPr>
@@ -25966,7 +25604,7 @@
           <p:cNvPr id="2" name="">
             <a:extLst xmlns:a="http://schemas.openxmlformats.org/drawingml/2006/main">
               <a:ext uri="{FF2B5EF4-FFF2-40B4-BE49-F238E27FC236}">
-                <a16:creationId xmlns:a16="http://schemas.microsoft.com/office/drawing/2014/main" id="{2DAC6EDF-CD93-46CA-BCCB-3B4C02D16C64}"/>
+                <a16:creationId xmlns:a16="http://schemas.microsoft.com/office/drawing/2014/main" id="{57C671D1-C05F-4C37-BC77-22B7C89364EA}"/>
               </a:ext>
             </a:extLst>
           </p:cNvPr>
@@ -26034,7 +25672,7 @@
           <p:cNvPr id="3" name="">
             <a:extLst xmlns:a="http://schemas.openxmlformats.org/drawingml/2006/main">
               <a:ext uri="{FF2B5EF4-FFF2-40B4-BE49-F238E27FC236}">
-                <a16:creationId xmlns:a16="http://schemas.microsoft.com/office/drawing/2014/main" id="{FF1DA258-A00E-480E-8443-00F86F72AEF8}"/>
+                <a16:creationId xmlns:a16="http://schemas.microsoft.com/office/drawing/2014/main" id="{6949E978-E5B3-4A69-BE42-27DCF9F79A4E}"/>
               </a:ext>
             </a:extLst>
           </p:cNvPr>
@@ -26102,7 +25740,7 @@
           <p:cNvPr id="4" name="">
             <a:extLst xmlns:a="http://schemas.openxmlformats.org/drawingml/2006/main">
               <a:ext uri="{FF2B5EF4-FFF2-40B4-BE49-F238E27FC236}">
-                <a16:creationId xmlns:a16="http://schemas.microsoft.com/office/drawing/2014/main" id="{3347A7B1-4355-4486-85FE-37AC591E1F31}"/>
+                <a16:creationId xmlns:a16="http://schemas.microsoft.com/office/drawing/2014/main" id="{AB5A49C3-1A1D-4007-9992-801781BB9CCA}"/>
               </a:ext>
             </a:extLst>
           </p:cNvPr>
@@ -26170,7 +25808,7 @@
           <p:cNvPr id="5" name="">
             <a:extLst xmlns:a="http://schemas.openxmlformats.org/drawingml/2006/main">
               <a:ext uri="{FF2B5EF4-FFF2-40B4-BE49-F238E27FC236}">
-                <a16:creationId xmlns:a16="http://schemas.microsoft.com/office/drawing/2014/main" id="{E724CD7E-0E41-45EC-8191-CB3B63CFDC49}"/>
+                <a16:creationId xmlns:a16="http://schemas.microsoft.com/office/drawing/2014/main" id="{82BEC309-84FB-4A7C-8642-1AD8CF1E0036}"/>
               </a:ext>
             </a:extLst>
           </p:cNvPr>
@@ -26228,7 +25866,7 @@
                 <a:ea typeface="NanumGothic"/>
                 <a:cs typeface="NanumGothic"/>
               </a:rPr>
-              <a:t>서울 구별 관제·저장 검증</a:t>
+              <a:t>서울 실측 ~9/30 확보</a:t>
             </a:r>
           </a:p>
           <a:p xmlns:a="http://schemas.openxmlformats.org/drawingml/2006/main">
@@ -26251,7 +25889,7 @@
                 <a:ea typeface="NanumGothic"/>
                 <a:cs typeface="NanumGothic"/>
               </a:rPr>
-              <a:t>전국 3곳·강수·장마 추가 조회</a:t>
+              <a:t>전국 실측3·합성17 분리</a:t>
             </a:r>
           </a:p>
           <a:p xmlns:a="http://schemas.openxmlformats.org/drawingml/2006/main">
@@ -26274,7 +25912,7 @@
                 <a:ea typeface="NanumGothic"/>
                 <a:cs typeface="NanumGothic"/>
               </a:rPr>
-              <a:t>자동 수집·오차 감시·교체 차단</a:t>
+              <a:t>수집·감시·교체 차단</a:t>
             </a:r>
           </a:p>
         </p:txBody>
@@ -26284,7 +25922,7 @@
           <p:cNvPr id="6" name="">
             <a:extLst xmlns:a="http://schemas.openxmlformats.org/drawingml/2006/main">
               <a:ext uri="{FF2B5EF4-FFF2-40B4-BE49-F238E27FC236}">
-                <a16:creationId xmlns:a16="http://schemas.microsoft.com/office/drawing/2014/main" id="{536C7248-6A4C-41EE-8D08-84AEC4DBADF2}"/>
+                <a16:creationId xmlns:a16="http://schemas.microsoft.com/office/drawing/2014/main" id="{211BFE4B-1D63-4257-B358-876E9750FEBE}"/>
               </a:ext>
             </a:extLst>
           </p:cNvPr>
@@ -26352,7 +25990,7 @@
           <p:cNvPr id="7" name="">
             <a:extLst xmlns:a="http://schemas.openxmlformats.org/drawingml/2006/main">
               <a:ext uri="{FF2B5EF4-FFF2-40B4-BE49-F238E27FC236}">
-                <a16:creationId xmlns:a16="http://schemas.microsoft.com/office/drawing/2014/main" id="{5CFBDA4A-28DA-46AC-9FEC-B60C65A2DF51}"/>
+                <a16:creationId xmlns:a16="http://schemas.microsoft.com/office/drawing/2014/main" id="{4E778859-C538-4653-8001-BA6E4A5AF738}"/>
               </a:ext>
             </a:extLst>
           </p:cNvPr>
@@ -26410,7 +26048,7 @@
                 <a:ea typeface="NanumGothic"/>
                 <a:cs typeface="NanumGothic"/>
               </a:rPr>
-              <a:t>다년도·추가 관측소</a:t>
+              <a:t>추가 실측·기존 모델 재평가</a:t>
             </a:r>
           </a:p>
           <a:p xmlns:a="http://schemas.openxmlformats.org/drawingml/2006/main">
@@ -26456,7 +26094,7 @@
                 <a:ea typeface="NanumGothic"/>
                 <a:cs typeface="NanumGothic"/>
               </a:rPr>
-              <a:t>계절별 표본·후보 대기 정책</a:t>
+              <a:t>합성 검증과 현장 실증</a:t>
             </a:r>
           </a:p>
           <a:p xmlns:a="http://schemas.openxmlformats.org/drawingml/2006/main">
@@ -26479,7 +26117,7 @@
                 <a:ea typeface="NanumGothic"/>
                 <a:cs typeface="NanumGothic"/>
               </a:rPr>
-              <a:t>후속 30일·현장 운영 승인</a:t>
+              <a:t>실제 후속30일·운영 승인</a:t>
             </a:r>
           </a:p>
         </p:txBody>
@@ -26489,7 +26127,7 @@
           <p:cNvPr id="8" name="">
             <a:extLst xmlns:a="http://schemas.openxmlformats.org/drawingml/2006/main">
               <a:ext uri="{FF2B5EF4-FFF2-40B4-BE49-F238E27FC236}">
-                <a16:creationId xmlns:a16="http://schemas.microsoft.com/office/drawing/2014/main" id="{029D896D-F414-4F1A-A941-A4E8C5AF0131}"/>
+                <a16:creationId xmlns:a16="http://schemas.microsoft.com/office/drawing/2014/main" id="{67839216-C097-4E7F-A8BF-2CED4560CFC1}"/>
               </a:ext>
             </a:extLst>
           </p:cNvPr>
@@ -26555,7 +26193,7 @@
     </p:spTree>
     <p:extLst>
       <p:ext uri="{BB962C8B-B14F-4D97-AF65-F5344CB8AC3E}">
-        <p14:creationId xmlns:p14="http://schemas.microsoft.com/office/powerpoint/2010/main" val="2037763860"/>
+        <p14:creationId xmlns:p14="http://schemas.microsoft.com/office/powerpoint/2010/main" val="421203315"/>
       </p:ext>
     </p:extLst>
   </p:cSld>
@@ -26862,7 +26500,7 @@
           <p:cNvPr id="5" name="">
             <a:extLst xmlns:a="http://schemas.openxmlformats.org/drawingml/2006/main">
               <a:ext uri="{FF2B5EF4-FFF2-40B4-BE49-F238E27FC236}">
-                <a16:creationId xmlns:a16="http://schemas.microsoft.com/office/drawing/2014/main" id="{8C426F71-EC93-4C9C-8198-0FC5630DBA1A}"/>
+                <a16:creationId xmlns:a16="http://schemas.microsoft.com/office/drawing/2014/main" id="{7DC0826F-567D-45C6-88FD-CC901441730D}"/>
               </a:ext>
             </a:extLst>
           </p:cNvPr>
@@ -26872,7 +26510,7 @@
           <p:nvPr/>
         </p:nvPicPr>
         <p:blipFill>
-          <a:blip xmlns:r="http://schemas.openxmlformats.org/officeDocument/2006/relationships" xmlns:a="http://schemas.openxmlformats.org/drawingml/2006/main" r:embed="R09cbf5ad75614ffc"/>
+          <a:blip xmlns:r="http://schemas.openxmlformats.org/officeDocument/2006/relationships" xmlns:a="http://schemas.openxmlformats.org/drawingml/2006/main" r:embed="Rb4f39ef9cbfd4e4d"/>
           <a:stretch xmlns:a="http://schemas.openxmlformats.org/drawingml/2006/main"/>
         </p:blipFill>
         <p:spPr>
@@ -27028,7 +26666,7 @@
           <p:cNvPr id="8" name="">
             <a:extLst xmlns:a="http://schemas.openxmlformats.org/drawingml/2006/main">
               <a:ext uri="{FF2B5EF4-FFF2-40B4-BE49-F238E27FC236}">
-                <a16:creationId xmlns:a16="http://schemas.microsoft.com/office/drawing/2014/main" id="{771CBF52-51BD-4AA7-80A3-B58BE8A3C23B}"/>
+                <a16:creationId xmlns:a16="http://schemas.microsoft.com/office/drawing/2014/main" id="{5BA45201-7143-4F47-A2D4-9DD79979BB5A}"/>
               </a:ext>
             </a:extLst>
           </p:cNvPr>
@@ -27038,7 +26676,7 @@
           <p:nvPr/>
         </p:nvPicPr>
         <p:blipFill>
-          <a:blip xmlns:r="http://schemas.openxmlformats.org/officeDocument/2006/relationships" xmlns:a="http://schemas.openxmlformats.org/drawingml/2006/main" r:embed="R2ec63d701ede431b"/>
+          <a:blip xmlns:r="http://schemas.openxmlformats.org/officeDocument/2006/relationships" xmlns:a="http://schemas.openxmlformats.org/drawingml/2006/main" r:embed="R7bc2486e7d204834"/>
           <a:stretch xmlns:a="http://schemas.openxmlformats.org/drawingml/2006/main"/>
         </p:blipFill>
         <p:spPr>
@@ -27194,7 +26832,7 @@
           <p:cNvPr id="11" name="">
             <a:extLst xmlns:a="http://schemas.openxmlformats.org/drawingml/2006/main">
               <a:ext uri="{FF2B5EF4-FFF2-40B4-BE49-F238E27FC236}">
-                <a16:creationId xmlns:a16="http://schemas.microsoft.com/office/drawing/2014/main" id="{A51D4847-D11A-47C3-A05A-CFF81DACFC84}"/>
+                <a16:creationId xmlns:a16="http://schemas.microsoft.com/office/drawing/2014/main" id="{AD8DE4D0-95BE-49B6-9768-1932F7E080FF}"/>
               </a:ext>
             </a:extLst>
           </p:cNvPr>
@@ -27204,7 +26842,7 @@
           <p:nvPr/>
         </p:nvPicPr>
         <p:blipFill>
-          <a:blip xmlns:r="http://schemas.openxmlformats.org/officeDocument/2006/relationships" xmlns:a="http://schemas.openxmlformats.org/drawingml/2006/main" r:embed="R6781f5ec7b104455"/>
+          <a:blip xmlns:r="http://schemas.openxmlformats.org/officeDocument/2006/relationships" xmlns:a="http://schemas.openxmlformats.org/drawingml/2006/main" r:embed="R23120dbc2cd24201"/>
           <a:stretch xmlns:a="http://schemas.openxmlformats.org/drawingml/2006/main"/>
         </p:blipFill>
         <p:spPr>
@@ -27360,7 +26998,7 @@
           <p:cNvPr id="14" name="">
             <a:extLst xmlns:a="http://schemas.openxmlformats.org/drawingml/2006/main">
               <a:ext uri="{FF2B5EF4-FFF2-40B4-BE49-F238E27FC236}">
-                <a16:creationId xmlns:a16="http://schemas.microsoft.com/office/drawing/2014/main" id="{3D3E0DEC-258B-400A-9D32-B41034EC5A84}"/>
+                <a16:creationId xmlns:a16="http://schemas.microsoft.com/office/drawing/2014/main" id="{7F37FEF5-0868-4210-9B42-EDEE9813C471}"/>
               </a:ext>
             </a:extLst>
           </p:cNvPr>
@@ -27370,7 +27008,7 @@
           <p:nvPr/>
         </p:nvPicPr>
         <p:blipFill>
-          <a:blip xmlns:r="http://schemas.openxmlformats.org/officeDocument/2006/relationships" xmlns:a="http://schemas.openxmlformats.org/drawingml/2006/main" r:embed="R0925315f4641494e"/>
+          <a:blip xmlns:r="http://schemas.openxmlformats.org/officeDocument/2006/relationships" xmlns:a="http://schemas.openxmlformats.org/drawingml/2006/main" r:embed="Raa072fe657684e75"/>
           <a:stretch xmlns:a="http://schemas.openxmlformats.org/drawingml/2006/main"/>
         </p:blipFill>
         <p:spPr>
@@ -27526,7 +27164,7 @@
           <p:cNvPr id="17" name="">
             <a:extLst xmlns:a="http://schemas.openxmlformats.org/drawingml/2006/main">
               <a:ext uri="{FF2B5EF4-FFF2-40B4-BE49-F238E27FC236}">
-                <a16:creationId xmlns:a16="http://schemas.microsoft.com/office/drawing/2014/main" id="{3DAB62A9-2912-4E39-96B4-5180CE3C6DFD}"/>
+                <a16:creationId xmlns:a16="http://schemas.microsoft.com/office/drawing/2014/main" id="{4062696E-E6CE-4D03-9BFC-C9B06432674D}"/>
               </a:ext>
             </a:extLst>
           </p:cNvPr>
@@ -27536,7 +27174,7 @@
           <p:nvPr/>
         </p:nvPicPr>
         <p:blipFill>
-          <a:blip xmlns:r="http://schemas.openxmlformats.org/officeDocument/2006/relationships" xmlns:a="http://schemas.openxmlformats.org/drawingml/2006/main" r:embed="R64741312b3064dad"/>
+          <a:blip xmlns:r="http://schemas.openxmlformats.org/officeDocument/2006/relationships" xmlns:a="http://schemas.openxmlformats.org/drawingml/2006/main" r:embed="R42be73f761a1455c"/>
           <a:stretch xmlns:a="http://schemas.openxmlformats.org/drawingml/2006/main"/>
         </p:blipFill>
         <p:spPr>
@@ -27692,7 +27330,7 @@
           <p:cNvPr id="20" name="">
             <a:extLst xmlns:a="http://schemas.openxmlformats.org/drawingml/2006/main">
               <a:ext uri="{FF2B5EF4-FFF2-40B4-BE49-F238E27FC236}">
-                <a16:creationId xmlns:a16="http://schemas.microsoft.com/office/drawing/2014/main" id="{E11060FE-2BCD-4C53-9DA9-8F39A6B42C52}"/>
+                <a16:creationId xmlns:a16="http://schemas.microsoft.com/office/drawing/2014/main" id="{16B3C775-731B-4194-B656-40F37AF1A17C}"/>
               </a:ext>
             </a:extLst>
           </p:cNvPr>
@@ -27702,7 +27340,7 @@
           <p:nvPr/>
         </p:nvPicPr>
         <p:blipFill>
-          <a:blip xmlns:r="http://schemas.openxmlformats.org/officeDocument/2006/relationships" xmlns:a="http://schemas.openxmlformats.org/drawingml/2006/main" r:embed="R7fddc3cb204642f2"/>
+          <a:blip xmlns:r="http://schemas.openxmlformats.org/officeDocument/2006/relationships" xmlns:a="http://schemas.openxmlformats.org/drawingml/2006/main" r:embed="R318eff2b066b4ed8"/>
           <a:stretch xmlns:a="http://schemas.openxmlformats.org/drawingml/2006/main"/>
         </p:blipFill>
         <p:spPr>
@@ -28144,7 +27782,7 @@
           <p:cNvPr id="5" name="">
             <a:extLst xmlns:a="http://schemas.openxmlformats.org/drawingml/2006/main">
               <a:ext uri="{FF2B5EF4-FFF2-40B4-BE49-F238E27FC236}">
-                <a16:creationId xmlns:a16="http://schemas.microsoft.com/office/drawing/2014/main" id="{5C0950E7-2C1C-4F57-93CC-DD049A7AA17F}"/>
+                <a16:creationId xmlns:a16="http://schemas.microsoft.com/office/drawing/2014/main" id="{38641FEF-39EE-454D-98DA-E9D5735FABB4}"/>
               </a:ext>
             </a:extLst>
           </p:cNvPr>
@@ -28819,7 +28457,7 @@
                           <a:ea typeface="NanumGothic"/>
                           <a:cs typeface="NanumGothic"/>
                         </a:rPr>
-                        <a:t>지하수 업무 담당자·서비스 운영자</a:t>
+                        <a:t>관측·시설 유지관리 기업 운영자</a:t>
                       </a:r>
                     </a:p>
                   </a:txBody>
@@ -30137,7 +29775,7 @@
           <p:cNvPr id="8" name="">
             <a:extLst xmlns:a="http://schemas.openxmlformats.org/drawingml/2006/main">
               <a:ext uri="{FF2B5EF4-FFF2-40B4-BE49-F238E27FC236}">
-                <a16:creationId xmlns:a16="http://schemas.microsoft.com/office/drawing/2014/main" id="{06115D62-2732-4FD7-9ECB-F370BBC7B60A}"/>
+                <a16:creationId xmlns:a16="http://schemas.microsoft.com/office/drawing/2014/main" id="{7D7070F3-4CA6-48FA-9472-9387BDD10728}"/>
               </a:ext>
             </a:extLst>
           </p:cNvPr>
@@ -30169,7 +29807,7 @@
           <p:cNvPr id="9" name="">
             <a:extLst xmlns:a="http://schemas.openxmlformats.org/drawingml/2006/main">
               <a:ext uri="{FF2B5EF4-FFF2-40B4-BE49-F238E27FC236}">
-                <a16:creationId xmlns:a16="http://schemas.microsoft.com/office/drawing/2014/main" id="{36167A5A-E106-41C6-9E21-5E61D26294E8}"/>
+                <a16:creationId xmlns:a16="http://schemas.microsoft.com/office/drawing/2014/main" id="{3E28BBBA-C787-4A29-8708-CE86A7466F4C}"/>
               </a:ext>
             </a:extLst>
           </p:cNvPr>
@@ -30644,7 +30282,7 @@
           <p:cNvPr id="5" name="">
             <a:extLst xmlns:a="http://schemas.openxmlformats.org/drawingml/2006/main">
               <a:ext uri="{FF2B5EF4-FFF2-40B4-BE49-F238E27FC236}">
-                <a16:creationId xmlns:a16="http://schemas.microsoft.com/office/drawing/2014/main" id="{9357BD36-9F04-4BEF-88BA-40D45435C9E7}"/>
+                <a16:creationId xmlns:a16="http://schemas.microsoft.com/office/drawing/2014/main" id="{C90036AB-BDD5-4785-B51D-71ABC8D23ABD}"/>
               </a:ext>
             </a:extLst>
           </p:cNvPr>
@@ -31348,7 +30986,7 @@
           <p:cNvPr id="5" name="Chart">
             <a:extLst xmlns:a="http://schemas.openxmlformats.org/drawingml/2006/main">
               <a:ext uri="{FF2B5EF4-FFF2-40B4-BE49-F238E27FC236}">
-                <a16:creationId xmlns:a16="http://schemas.microsoft.com/office/drawing/2014/main" id="{09667BD0-0F21-4B4F-A3B2-43D8E8693AD7}"/>
+                <a16:creationId xmlns:a16="http://schemas.microsoft.com/office/drawing/2014/main" id="{1FF454EC-B75E-4D16-96B4-CC12CF6B6850}"/>
               </a:ext>
             </a:extLst>
           </p:cNvPr>
@@ -31361,7 +30999,7 @@
         </p:xfrm>
         <a:graphic xmlns:a="http://schemas.openxmlformats.org/drawingml/2006/main">
           <a:graphicData uri="http://schemas.openxmlformats.org/drawingml/2006/chart">
-            <c:chart xmlns:r="http://schemas.openxmlformats.org/officeDocument/2006/relationships" xmlns:c="http://schemas.openxmlformats.org/drawingml/2006/chart" r:id="Rd09b57c48a644384"/>
+            <c:chart xmlns:r="http://schemas.openxmlformats.org/officeDocument/2006/relationships" xmlns:c="http://schemas.openxmlformats.org/drawingml/2006/chart" r:id="Rc8152a2ec65f44ed"/>
           </a:graphicData>
         </a:graphic>
       </p:graphicFrame>
@@ -31999,7 +31637,7 @@
           <p:cNvPr id="5" name="">
             <a:extLst xmlns:a="http://schemas.openxmlformats.org/drawingml/2006/main">
               <a:ext uri="{FF2B5EF4-FFF2-40B4-BE49-F238E27FC236}">
-                <a16:creationId xmlns:a16="http://schemas.microsoft.com/office/drawing/2014/main" id="{3C0BC44A-50A6-4F78-B63F-89AAE1EB3714}"/>
+                <a16:creationId xmlns:a16="http://schemas.microsoft.com/office/drawing/2014/main" id="{3A082AA1-FBCF-421C-B1B3-DC32008478B4}"/>
               </a:ext>
             </a:extLst>
           </p:cNvPr>
